--- a/paper/figures/raman_training_minimal_editable.pptx
+++ b/paper/figures/raman_training_minimal_editable.pptx
@@ -331,7 +331,6 @@
           <a:lstStyle/>
           <a:p>
             <a:r>
-              <a:rPr dirty="0"/>
               <a:t>Author-finalization draft. Figure text is deliberately limited to module labels. The corresponding manuscript contains the panel caption and method details; its artwork slot remains a placeholder until the author finalizes the figure. Blue circles represent query embeddings, orange squares theoretical references; curves and matrices are schematic.</a:t>
             </a:r>
           </a:p>
@@ -760,7 +759,7 @@
           <a:bodyPr/>
           <a:lstStyle/>
           <a:p>
-            <a:endParaRPr lang="en-US"/>
+            <a:endParaRPr/>
           </a:p>
         </p:txBody>
       </p:sp>
@@ -802,7 +801,7 @@
           <a:bodyPr/>
           <a:lstStyle/>
           <a:p>
-            <a:endParaRPr lang="en-US"/>
+            <a:endParaRPr/>
           </a:p>
         </p:txBody>
       </p:sp>
@@ -1148,7 +1147,7 @@
           <a:bodyPr/>
           <a:lstStyle/>
           <a:p>
-            <a:endParaRPr lang="en-US"/>
+            <a:endParaRPr/>
           </a:p>
         </p:txBody>
       </p:sp>
@@ -1264,7 +1263,7 @@
           <a:bodyPr/>
           <a:lstStyle/>
           <a:p>
-            <a:endParaRPr lang="en-US"/>
+            <a:endParaRPr/>
           </a:p>
         </p:txBody>
       </p:sp>
@@ -1319,7 +1318,7 @@
           <a:bodyPr/>
           <a:lstStyle/>
           <a:p>
-            <a:endParaRPr lang="en-US"/>
+            <a:endParaRPr/>
           </a:p>
         </p:txBody>
       </p:sp>
@@ -1361,7 +1360,7 @@
           <a:bodyPr/>
           <a:lstStyle/>
           <a:p>
-            <a:endParaRPr lang="en-US"/>
+            <a:endParaRPr/>
           </a:p>
         </p:txBody>
       </p:sp>
@@ -1707,7 +1706,7 @@
           <a:bodyPr/>
           <a:lstStyle/>
           <a:p>
-            <a:endParaRPr lang="en-US"/>
+            <a:endParaRPr/>
           </a:p>
         </p:txBody>
       </p:sp>
@@ -1807,7 +1806,7 @@
           <a:bodyPr/>
           <a:lstStyle/>
           <a:p>
-            <a:endParaRPr lang="en-US"/>
+            <a:endParaRPr/>
           </a:p>
         </p:txBody>
       </p:sp>
@@ -2153,7 +2152,7 @@
           <a:bodyPr/>
           <a:lstStyle/>
           <a:p>
-            <a:endParaRPr lang="en-US"/>
+            <a:endParaRPr/>
           </a:p>
         </p:txBody>
       </p:sp>
@@ -2263,7 +2262,7 @@
           <a:bodyPr/>
           <a:lstStyle/>
           <a:p>
-            <a:endParaRPr lang="en-US"/>
+            <a:endParaRPr/>
           </a:p>
         </p:txBody>
       </p:sp>
@@ -2318,7 +2317,7 @@
           <a:bodyPr/>
           <a:lstStyle/>
           <a:p>
-            <a:endParaRPr lang="en-US"/>
+            <a:endParaRPr/>
           </a:p>
         </p:txBody>
       </p:sp>
@@ -2370,7 +2369,7 @@
           <a:bodyPr/>
           <a:lstStyle/>
           <a:p>
-            <a:endParaRPr lang="en-US"/>
+            <a:endParaRPr/>
           </a:p>
         </p:txBody>
       </p:sp>
@@ -2425,7 +2424,7 @@
           <a:bodyPr/>
           <a:lstStyle/>
           <a:p>
-            <a:endParaRPr lang="en-US"/>
+            <a:endParaRPr/>
           </a:p>
         </p:txBody>
       </p:sp>
@@ -2467,7 +2466,7 @@
           <a:bodyPr/>
           <a:lstStyle/>
           <a:p>
-            <a:endParaRPr lang="en-US"/>
+            <a:endParaRPr/>
           </a:p>
         </p:txBody>
       </p:sp>
@@ -2516,7 +2515,7 @@
               </a:defRPr>
             </a:pPr>
             <a:r>
-              <a:rPr sz="1350" b="1" dirty="0">
+              <a:rPr sz="1350" b="1">
                 <a:solidFill>
                   <a:srgbClr val="202932"/>
                 </a:solidFill>
@@ -2574,7 +2573,7 @@
               </a:defRPr>
             </a:pPr>
             <a:r>
-              <a:rPr sz="1200" dirty="0">
+              <a:rPr sz="1200">
                 <a:solidFill>
                   <a:srgbClr val="202932"/>
                 </a:solidFill>
@@ -2635,7 +2634,7 @@
           <a:bodyPr/>
           <a:lstStyle/>
           <a:p>
-            <a:endParaRPr lang="en-US"/>
+            <a:endParaRPr/>
           </a:p>
         </p:txBody>
       </p:sp>
@@ -2690,7 +2689,7 @@
           <a:bodyPr/>
           <a:lstStyle/>
           <a:p>
-            <a:endParaRPr lang="en-US"/>
+            <a:endParaRPr/>
           </a:p>
         </p:txBody>
       </p:sp>
@@ -2742,7 +2741,7 @@
           <a:bodyPr/>
           <a:lstStyle/>
           <a:p>
-            <a:endParaRPr lang="en-US"/>
+            <a:endParaRPr/>
           </a:p>
         </p:txBody>
       </p:sp>
@@ -2797,7 +2796,7 @@
           <a:bodyPr/>
           <a:lstStyle/>
           <a:p>
-            <a:endParaRPr lang="en-US"/>
+            <a:endParaRPr/>
           </a:p>
         </p:txBody>
       </p:sp>
@@ -2839,7 +2838,7 @@
           <a:bodyPr/>
           <a:lstStyle/>
           <a:p>
-            <a:endParaRPr lang="en-US"/>
+            <a:endParaRPr/>
           </a:p>
         </p:txBody>
       </p:sp>
@@ -3065,7 +3064,7 @@
           <a:bodyPr/>
           <a:lstStyle/>
           <a:p>
-            <a:endParaRPr lang="en-US"/>
+            <a:endParaRPr/>
           </a:p>
         </p:txBody>
       </p:sp>
@@ -3120,7 +3119,7 @@
           <a:bodyPr/>
           <a:lstStyle/>
           <a:p>
-            <a:endParaRPr lang="en-US"/>
+            <a:endParaRPr/>
           </a:p>
         </p:txBody>
       </p:sp>
@@ -3172,7 +3171,7 @@
           <a:bodyPr/>
           <a:lstStyle/>
           <a:p>
-            <a:endParaRPr lang="en-US"/>
+            <a:endParaRPr/>
           </a:p>
         </p:txBody>
       </p:sp>
@@ -3227,7 +3226,7 @@
           <a:bodyPr/>
           <a:lstStyle/>
           <a:p>
-            <a:endParaRPr lang="en-US"/>
+            <a:endParaRPr/>
           </a:p>
         </p:txBody>
       </p:sp>
@@ -3269,7 +3268,7 @@
           <a:bodyPr/>
           <a:lstStyle/>
           <a:p>
-            <a:endParaRPr lang="en-US"/>
+            <a:endParaRPr/>
           </a:p>
         </p:txBody>
       </p:sp>
@@ -3309,7 +3308,7 @@
           <a:bodyPr/>
           <a:lstStyle/>
           <a:p>
-            <a:endParaRPr lang="en-US"/>
+            <a:endParaRPr/>
           </a:p>
         </p:txBody>
       </p:sp>
@@ -3351,7 +3350,7 @@
           <a:bodyPr/>
           <a:lstStyle/>
           <a:p>
-            <a:endParaRPr lang="en-US"/>
+            <a:endParaRPr/>
           </a:p>
         </p:txBody>
       </p:sp>
@@ -3391,7 +3390,7 @@
           <a:bodyPr/>
           <a:lstStyle/>
           <a:p>
-            <a:endParaRPr lang="en-US"/>
+            <a:endParaRPr/>
           </a:p>
         </p:txBody>
       </p:sp>
@@ -3433,7 +3432,7 @@
           <a:bodyPr/>
           <a:lstStyle/>
           <a:p>
-            <a:endParaRPr lang="en-US"/>
+            <a:endParaRPr/>
           </a:p>
         </p:txBody>
       </p:sp>
@@ -3473,7 +3472,7 @@
           <a:bodyPr/>
           <a:lstStyle/>
           <a:p>
-            <a:endParaRPr lang="en-US"/>
+            <a:endParaRPr/>
           </a:p>
         </p:txBody>
       </p:sp>
@@ -3515,7 +3514,7 @@
           <a:bodyPr/>
           <a:lstStyle/>
           <a:p>
-            <a:endParaRPr lang="en-US"/>
+            <a:endParaRPr/>
           </a:p>
         </p:txBody>
       </p:sp>
@@ -3555,7 +3554,7 @@
           <a:bodyPr/>
           <a:lstStyle/>
           <a:p>
-            <a:endParaRPr lang="en-US"/>
+            <a:endParaRPr/>
           </a:p>
         </p:txBody>
       </p:sp>
@@ -3597,7 +3596,7 @@
           <a:bodyPr/>
           <a:lstStyle/>
           <a:p>
-            <a:endParaRPr lang="en-US"/>
+            <a:endParaRPr/>
           </a:p>
         </p:txBody>
       </p:sp>
@@ -3637,7 +3636,7 @@
           <a:bodyPr/>
           <a:lstStyle/>
           <a:p>
-            <a:endParaRPr lang="en-US"/>
+            <a:endParaRPr/>
           </a:p>
         </p:txBody>
       </p:sp>
@@ -3679,7 +3678,7 @@
           <a:bodyPr/>
           <a:lstStyle/>
           <a:p>
-            <a:endParaRPr lang="en-US"/>
+            <a:endParaRPr/>
           </a:p>
         </p:txBody>
       </p:sp>
@@ -3719,7 +3718,7 @@
           <a:bodyPr/>
           <a:lstStyle/>
           <a:p>
-            <a:endParaRPr lang="en-US"/>
+            <a:endParaRPr/>
           </a:p>
         </p:txBody>
       </p:sp>
@@ -3761,7 +3760,7 @@
           <a:bodyPr/>
           <a:lstStyle/>
           <a:p>
-            <a:endParaRPr lang="en-US"/>
+            <a:endParaRPr/>
           </a:p>
         </p:txBody>
       </p:sp>
@@ -3801,7 +3800,7 @@
           <a:bodyPr/>
           <a:lstStyle/>
           <a:p>
-            <a:endParaRPr lang="en-US"/>
+            <a:endParaRPr/>
           </a:p>
         </p:txBody>
       </p:sp>
@@ -3901,7 +3900,7 @@
           <a:bodyPr/>
           <a:lstStyle/>
           <a:p>
-            <a:endParaRPr lang="en-US"/>
+            <a:endParaRPr/>
           </a:p>
         </p:txBody>
       </p:sp>
@@ -3941,7 +3940,7 @@
           <a:bodyPr/>
           <a:lstStyle/>
           <a:p>
-            <a:endParaRPr lang="en-US"/>
+            <a:endParaRPr/>
           </a:p>
         </p:txBody>
       </p:sp>
@@ -3983,7 +3982,7 @@
           <a:bodyPr/>
           <a:lstStyle/>
           <a:p>
-            <a:endParaRPr lang="en-US"/>
+            <a:endParaRPr/>
           </a:p>
         </p:txBody>
       </p:sp>
@@ -4023,7 +4022,7 @@
           <a:bodyPr/>
           <a:lstStyle/>
           <a:p>
-            <a:endParaRPr lang="en-US"/>
+            <a:endParaRPr/>
           </a:p>
         </p:txBody>
       </p:sp>
@@ -4065,7 +4064,7 @@
           <a:bodyPr/>
           <a:lstStyle/>
           <a:p>
-            <a:endParaRPr lang="en-US"/>
+            <a:endParaRPr/>
           </a:p>
         </p:txBody>
       </p:sp>
@@ -4105,7 +4104,7 @@
           <a:bodyPr/>
           <a:lstStyle/>
           <a:p>
-            <a:endParaRPr lang="en-US"/>
+            <a:endParaRPr/>
           </a:p>
         </p:txBody>
       </p:sp>
@@ -4147,7 +4146,7 @@
           <a:bodyPr/>
           <a:lstStyle/>
           <a:p>
-            <a:endParaRPr lang="en-US"/>
+            <a:endParaRPr/>
           </a:p>
         </p:txBody>
       </p:sp>
@@ -4187,7 +4186,7 @@
           <a:bodyPr/>
           <a:lstStyle/>
           <a:p>
-            <a:endParaRPr lang="en-US"/>
+            <a:endParaRPr/>
           </a:p>
         </p:txBody>
       </p:sp>
@@ -4229,7 +4228,7 @@
           <a:bodyPr/>
           <a:lstStyle/>
           <a:p>
-            <a:endParaRPr lang="en-US"/>
+            <a:endParaRPr/>
           </a:p>
         </p:txBody>
       </p:sp>
@@ -4269,7 +4268,7 @@
           <a:bodyPr/>
           <a:lstStyle/>
           <a:p>
-            <a:endParaRPr lang="en-US"/>
+            <a:endParaRPr/>
           </a:p>
         </p:txBody>
       </p:sp>
@@ -4311,7 +4310,7 @@
           <a:bodyPr/>
           <a:lstStyle/>
           <a:p>
-            <a:endParaRPr lang="en-US"/>
+            <a:endParaRPr/>
           </a:p>
         </p:txBody>
       </p:sp>
@@ -4351,7 +4350,7 @@
           <a:bodyPr/>
           <a:lstStyle/>
           <a:p>
-            <a:endParaRPr lang="en-US"/>
+            <a:endParaRPr/>
           </a:p>
         </p:txBody>
       </p:sp>
@@ -4393,7 +4392,7 @@
           <a:bodyPr/>
           <a:lstStyle/>
           <a:p>
-            <a:endParaRPr lang="en-US"/>
+            <a:endParaRPr/>
           </a:p>
         </p:txBody>
       </p:sp>
@@ -4433,7 +4432,7 @@
           <a:bodyPr/>
           <a:lstStyle/>
           <a:p>
-            <a:endParaRPr lang="en-US"/>
+            <a:endParaRPr/>
           </a:p>
         </p:txBody>
       </p:sp>
@@ -4717,7 +4716,7 @@
           <a:bodyPr/>
           <a:lstStyle/>
           <a:p>
-            <a:endParaRPr lang="en-US"/>
+            <a:endParaRPr/>
           </a:p>
         </p:txBody>
       </p:sp>
@@ -4772,7 +4771,7 @@
           <a:bodyPr/>
           <a:lstStyle/>
           <a:p>
-            <a:endParaRPr lang="en-US"/>
+            <a:endParaRPr/>
           </a:p>
         </p:txBody>
       </p:sp>
@@ -4814,7 +4813,7 @@
           <a:bodyPr/>
           <a:lstStyle/>
           <a:p>
-            <a:endParaRPr lang="en-US"/>
+            <a:endParaRPr/>
           </a:p>
         </p:txBody>
       </p:sp>
@@ -4863,7 +4862,7 @@
               </a:defRPr>
             </a:pPr>
             <a:r>
-              <a:rPr sz="1350" b="1" dirty="0">
+              <a:rPr sz="1350" b="1">
                 <a:solidFill>
                   <a:srgbClr val="202932"/>
                 </a:solidFill>
@@ -4924,7 +4923,7 @@
           <a:bodyPr/>
           <a:lstStyle/>
           <a:p>
-            <a:endParaRPr lang="en-US"/>
+            <a:endParaRPr/>
           </a:p>
         </p:txBody>
       </p:sp>
@@ -4979,7 +4978,7 @@
           <a:bodyPr/>
           <a:lstStyle/>
           <a:p>
-            <a:endParaRPr lang="en-US"/>
+            <a:endParaRPr/>
           </a:p>
         </p:txBody>
       </p:sp>
@@ -5021,7 +5020,7 @@
           <a:bodyPr/>
           <a:lstStyle/>
           <a:p>
-            <a:endParaRPr lang="en-US"/>
+            <a:endParaRPr/>
           </a:p>
         </p:txBody>
       </p:sp>
@@ -5189,7 +5188,7 @@
           <a:bodyPr/>
           <a:lstStyle/>
           <a:p>
-            <a:endParaRPr lang="en-US"/>
+            <a:endParaRPr/>
           </a:p>
         </p:txBody>
       </p:sp>
@@ -5244,7 +5243,7 @@
           <a:bodyPr/>
           <a:lstStyle/>
           <a:p>
-            <a:endParaRPr lang="en-US"/>
+            <a:endParaRPr/>
           </a:p>
         </p:txBody>
       </p:sp>
@@ -5286,7 +5285,7 @@
           <a:bodyPr/>
           <a:lstStyle/>
           <a:p>
-            <a:endParaRPr lang="en-US"/>
+            <a:endParaRPr/>
           </a:p>
         </p:txBody>
       </p:sp>
@@ -5326,7 +5325,7 @@
           <a:bodyPr/>
           <a:lstStyle/>
           <a:p>
-            <a:endParaRPr lang="en-US"/>
+            <a:endParaRPr/>
           </a:p>
         </p:txBody>
       </p:sp>
@@ -5368,7 +5367,7 @@
           <a:bodyPr/>
           <a:lstStyle/>
           <a:p>
-            <a:endParaRPr lang="en-US"/>
+            <a:endParaRPr/>
           </a:p>
         </p:txBody>
       </p:sp>
@@ -5408,7 +5407,7 @@
           <a:bodyPr/>
           <a:lstStyle/>
           <a:p>
-            <a:endParaRPr lang="en-US"/>
+            <a:endParaRPr/>
           </a:p>
         </p:txBody>
       </p:sp>
@@ -5450,7 +5449,7 @@
           <a:bodyPr/>
           <a:lstStyle/>
           <a:p>
-            <a:endParaRPr lang="en-US"/>
+            <a:endParaRPr/>
           </a:p>
         </p:txBody>
       </p:sp>
@@ -5490,7 +5489,7 @@
           <a:bodyPr/>
           <a:lstStyle/>
           <a:p>
-            <a:endParaRPr lang="en-US"/>
+            <a:endParaRPr/>
           </a:p>
         </p:txBody>
       </p:sp>
@@ -5532,7 +5531,7 @@
           <a:bodyPr/>
           <a:lstStyle/>
           <a:p>
-            <a:endParaRPr lang="en-US"/>
+            <a:endParaRPr/>
           </a:p>
         </p:txBody>
       </p:sp>
@@ -5572,7 +5571,7 @@
           <a:bodyPr/>
           <a:lstStyle/>
           <a:p>
-            <a:endParaRPr lang="en-US"/>
+            <a:endParaRPr/>
           </a:p>
         </p:txBody>
       </p:sp>
@@ -5614,7 +5613,7 @@
           <a:bodyPr/>
           <a:lstStyle/>
           <a:p>
-            <a:endParaRPr lang="en-US"/>
+            <a:endParaRPr/>
           </a:p>
         </p:txBody>
       </p:sp>
@@ -5654,7 +5653,7 @@
           <a:bodyPr/>
           <a:lstStyle/>
           <a:p>
-            <a:endParaRPr lang="en-US"/>
+            <a:endParaRPr/>
           </a:p>
         </p:txBody>
       </p:sp>
@@ -5696,7 +5695,7 @@
           <a:bodyPr/>
           <a:lstStyle/>
           <a:p>
-            <a:endParaRPr lang="en-US"/>
+            <a:endParaRPr/>
           </a:p>
         </p:txBody>
       </p:sp>
@@ -5736,7 +5735,7 @@
           <a:bodyPr/>
           <a:lstStyle/>
           <a:p>
-            <a:endParaRPr lang="en-US"/>
+            <a:endParaRPr/>
           </a:p>
         </p:txBody>
       </p:sp>
@@ -5778,7 +5777,7 @@
           <a:bodyPr/>
           <a:lstStyle/>
           <a:p>
-            <a:endParaRPr lang="en-US"/>
+            <a:endParaRPr/>
           </a:p>
         </p:txBody>
       </p:sp>
@@ -5818,7 +5817,7 @@
           <a:bodyPr/>
           <a:lstStyle/>
           <a:p>
-            <a:endParaRPr lang="en-US"/>
+            <a:endParaRPr/>
           </a:p>
         </p:txBody>
       </p:sp>
@@ -5918,7 +5917,7 @@
           <a:bodyPr/>
           <a:lstStyle/>
           <a:p>
-            <a:endParaRPr lang="en-US"/>
+            <a:endParaRPr/>
           </a:p>
         </p:txBody>
       </p:sp>
@@ -6016,7 +6015,7 @@
           <a:bodyPr/>
           <a:lstStyle/>
           <a:p>
-            <a:endParaRPr lang="en-US"/>
+            <a:endParaRPr/>
           </a:p>
         </p:txBody>
       </p:sp>
@@ -6056,7 +6055,7 @@
           <a:bodyPr/>
           <a:lstStyle/>
           <a:p>
-            <a:endParaRPr lang="en-US"/>
+            <a:endParaRPr/>
           </a:p>
         </p:txBody>
       </p:sp>
@@ -6098,7 +6097,7 @@
           <a:bodyPr/>
           <a:lstStyle/>
           <a:p>
-            <a:endParaRPr lang="en-US"/>
+            <a:endParaRPr/>
           </a:p>
         </p:txBody>
       </p:sp>
@@ -6138,7 +6137,7 @@
           <a:bodyPr/>
           <a:lstStyle/>
           <a:p>
-            <a:endParaRPr lang="en-US"/>
+            <a:endParaRPr/>
           </a:p>
         </p:txBody>
       </p:sp>
@@ -6180,7 +6179,7 @@
           <a:bodyPr/>
           <a:lstStyle/>
           <a:p>
-            <a:endParaRPr lang="en-US"/>
+            <a:endParaRPr/>
           </a:p>
         </p:txBody>
       </p:sp>
@@ -6220,7 +6219,7 @@
           <a:bodyPr/>
           <a:lstStyle/>
           <a:p>
-            <a:endParaRPr lang="en-US"/>
+            <a:endParaRPr/>
           </a:p>
         </p:txBody>
       </p:sp>
@@ -6262,7 +6261,7 @@
           <a:bodyPr/>
           <a:lstStyle/>
           <a:p>
-            <a:endParaRPr lang="en-US"/>
+            <a:endParaRPr/>
           </a:p>
         </p:txBody>
       </p:sp>
@@ -6302,7 +6301,7 @@
           <a:bodyPr/>
           <a:lstStyle/>
           <a:p>
-            <a:endParaRPr lang="en-US"/>
+            <a:endParaRPr/>
           </a:p>
         </p:txBody>
       </p:sp>
@@ -6342,7 +6341,7 @@
           <a:bodyPr/>
           <a:lstStyle/>
           <a:p>
-            <a:endParaRPr lang="en-US"/>
+            <a:endParaRPr/>
           </a:p>
         </p:txBody>
       </p:sp>
@@ -6397,7 +6396,7 @@
           <a:bodyPr/>
           <a:lstStyle/>
           <a:p>
-            <a:endParaRPr lang="en-US"/>
+            <a:endParaRPr/>
           </a:p>
         </p:txBody>
       </p:sp>
@@ -6452,7 +6451,7 @@
           <a:bodyPr/>
           <a:lstStyle/>
           <a:p>
-            <a:endParaRPr lang="en-US"/>
+            <a:endParaRPr/>
           </a:p>
         </p:txBody>
       </p:sp>
@@ -6507,7 +6506,7 @@
           <a:bodyPr/>
           <a:lstStyle/>
           <a:p>
-            <a:endParaRPr lang="en-US"/>
+            <a:endParaRPr/>
           </a:p>
         </p:txBody>
       </p:sp>
@@ -6607,7 +6606,7 @@
           <a:bodyPr/>
           <a:lstStyle/>
           <a:p>
-            <a:endParaRPr lang="en-US"/>
+            <a:endParaRPr/>
           </a:p>
         </p:txBody>
       </p:sp>
@@ -6717,7 +6716,7 @@
           <a:bodyPr/>
           <a:lstStyle/>
           <a:p>
-            <a:endParaRPr lang="en-US"/>
+            <a:endParaRPr/>
           </a:p>
         </p:txBody>
       </p:sp>
@@ -6769,7 +6768,7 @@
           <a:bodyPr/>
           <a:lstStyle/>
           <a:p>
-            <a:endParaRPr lang="en-US"/>
+            <a:endParaRPr/>
           </a:p>
         </p:txBody>
       </p:sp>
@@ -6821,7 +6820,7 @@
           <a:bodyPr/>
           <a:lstStyle/>
           <a:p>
-            <a:endParaRPr lang="en-US"/>
+            <a:endParaRPr/>
           </a:p>
         </p:txBody>
       </p:sp>
@@ -6873,7 +6872,7 @@
           <a:bodyPr/>
           <a:lstStyle/>
           <a:p>
-            <a:endParaRPr lang="en-US"/>
+            <a:endParaRPr/>
           </a:p>
         </p:txBody>
       </p:sp>
@@ -6925,7 +6924,7 @@
           <a:bodyPr/>
           <a:lstStyle/>
           <a:p>
-            <a:endParaRPr lang="en-US"/>
+            <a:endParaRPr/>
           </a:p>
         </p:txBody>
       </p:sp>
@@ -6977,7 +6976,7 @@
           <a:bodyPr/>
           <a:lstStyle/>
           <a:p>
-            <a:endParaRPr lang="en-US"/>
+            <a:endParaRPr/>
           </a:p>
         </p:txBody>
       </p:sp>
@@ -7029,7 +7028,7 @@
           <a:bodyPr/>
           <a:lstStyle/>
           <a:p>
-            <a:endParaRPr lang="en-US"/>
+            <a:endParaRPr/>
           </a:p>
         </p:txBody>
       </p:sp>
@@ -7069,7 +7068,7 @@
           <a:bodyPr/>
           <a:lstStyle/>
           <a:p>
-            <a:endParaRPr lang="en-US"/>
+            <a:endParaRPr/>
           </a:p>
         </p:txBody>
       </p:sp>
@@ -7109,7 +7108,7 @@
           <a:bodyPr/>
           <a:lstStyle/>
           <a:p>
-            <a:endParaRPr lang="en-US"/>
+            <a:endParaRPr/>
           </a:p>
         </p:txBody>
       </p:sp>
@@ -7149,7 +7148,7 @@
           <a:bodyPr/>
           <a:lstStyle/>
           <a:p>
-            <a:endParaRPr lang="en-US"/>
+            <a:endParaRPr/>
           </a:p>
         </p:txBody>
       </p:sp>
@@ -7189,7 +7188,7 @@
           <a:bodyPr/>
           <a:lstStyle/>
           <a:p>
-            <a:endParaRPr lang="en-US"/>
+            <a:endParaRPr/>
           </a:p>
         </p:txBody>
       </p:sp>
@@ -7229,7 +7228,7 @@
           <a:bodyPr/>
           <a:lstStyle/>
           <a:p>
-            <a:endParaRPr lang="en-US"/>
+            <a:endParaRPr/>
           </a:p>
         </p:txBody>
       </p:sp>
@@ -7269,7 +7268,7 @@
           <a:bodyPr/>
           <a:lstStyle/>
           <a:p>
-            <a:endParaRPr lang="en-US"/>
+            <a:endParaRPr/>
           </a:p>
         </p:txBody>
       </p:sp>
@@ -7309,7 +7308,7 @@
           <a:bodyPr/>
           <a:lstStyle/>
           <a:p>
-            <a:endParaRPr lang="en-US"/>
+            <a:endParaRPr/>
           </a:p>
         </p:txBody>
       </p:sp>
@@ -7361,7 +7360,7 @@
           <a:bodyPr/>
           <a:lstStyle/>
           <a:p>
-            <a:endParaRPr lang="en-US"/>
+            <a:endParaRPr/>
           </a:p>
         </p:txBody>
       </p:sp>
@@ -7416,7 +7415,7 @@
           <a:bodyPr/>
           <a:lstStyle/>
           <a:p>
-            <a:endParaRPr lang="en-US"/>
+            <a:endParaRPr/>
           </a:p>
         </p:txBody>
       </p:sp>
@@ -7574,7 +7573,7 @@
           <a:bodyPr/>
           <a:lstStyle/>
           <a:p>
-            <a:endParaRPr lang="en-US"/>
+            <a:endParaRPr/>
           </a:p>
         </p:txBody>
       </p:sp>
@@ -7614,7 +7613,7 @@
           <a:bodyPr/>
           <a:lstStyle/>
           <a:p>
-            <a:endParaRPr lang="en-US"/>
+            <a:endParaRPr/>
           </a:p>
         </p:txBody>
       </p:sp>
@@ -7656,7 +7655,7 @@
           <a:bodyPr/>
           <a:lstStyle/>
           <a:p>
-            <a:endParaRPr lang="en-US"/>
+            <a:endParaRPr/>
           </a:p>
         </p:txBody>
       </p:sp>
@@ -7696,7 +7695,7 @@
           <a:bodyPr/>
           <a:lstStyle/>
           <a:p>
-            <a:endParaRPr lang="en-US"/>
+            <a:endParaRPr/>
           </a:p>
         </p:txBody>
       </p:sp>
@@ -7738,7 +7737,7 @@
           <a:bodyPr/>
           <a:lstStyle/>
           <a:p>
-            <a:endParaRPr lang="en-US"/>
+            <a:endParaRPr/>
           </a:p>
         </p:txBody>
       </p:sp>
@@ -7778,7 +7777,7 @@
           <a:bodyPr/>
           <a:lstStyle/>
           <a:p>
-            <a:endParaRPr lang="en-US"/>
+            <a:endParaRPr/>
           </a:p>
         </p:txBody>
       </p:sp>
@@ -7820,7 +7819,7 @@
           <a:bodyPr/>
           <a:lstStyle/>
           <a:p>
-            <a:endParaRPr lang="en-US"/>
+            <a:endParaRPr/>
           </a:p>
         </p:txBody>
       </p:sp>
@@ -7860,7 +7859,7 @@
           <a:bodyPr/>
           <a:lstStyle/>
           <a:p>
-            <a:endParaRPr lang="en-US"/>
+            <a:endParaRPr/>
           </a:p>
         </p:txBody>
       </p:sp>
@@ -7902,7 +7901,7 @@
           <a:bodyPr/>
           <a:lstStyle/>
           <a:p>
-            <a:endParaRPr lang="en-US"/>
+            <a:endParaRPr/>
           </a:p>
         </p:txBody>
       </p:sp>
@@ -7942,7 +7941,7 @@
           <a:bodyPr/>
           <a:lstStyle/>
           <a:p>
-            <a:endParaRPr lang="en-US"/>
+            <a:endParaRPr/>
           </a:p>
         </p:txBody>
       </p:sp>
@@ -7984,7 +7983,7 @@
           <a:bodyPr/>
           <a:lstStyle/>
           <a:p>
-            <a:endParaRPr lang="en-US"/>
+            <a:endParaRPr/>
           </a:p>
         </p:txBody>
       </p:sp>
@@ -8024,7 +8023,7 @@
           <a:bodyPr/>
           <a:lstStyle/>
           <a:p>
-            <a:endParaRPr lang="en-US"/>
+            <a:endParaRPr/>
           </a:p>
         </p:txBody>
       </p:sp>
@@ -8073,7 +8072,7 @@
               </a:defRPr>
             </a:pPr>
             <a:r>
-              <a:rPr sz="1350" dirty="0">
+              <a:rPr sz="1350">
                 <a:solidFill>
                   <a:srgbClr val="202932"/>
                 </a:solidFill>
@@ -8161,7 +8160,7 @@
         <p:spPr>
           <a:xfrm>
             <a:off x="190500" y="3043238"/>
-            <a:ext cx="7359872" cy="1971676"/>
+            <a:ext cx="7359872" cy="1909763"/>
           </a:xfrm>
           <a:prstGeom prst="roundRect">
             <a:avLst>
@@ -8182,7 +8181,7 @@
           <a:bodyPr/>
           <a:lstStyle/>
           <a:p>
-            <a:endParaRPr lang="en-US"/>
+            <a:endParaRPr/>
           </a:p>
         </p:txBody>
       </p:sp>
@@ -8282,7 +8281,7 @@
           <a:bodyPr/>
           <a:lstStyle/>
           <a:p>
-            <a:endParaRPr lang="en-US"/>
+            <a:endParaRPr/>
           </a:p>
         </p:txBody>
       </p:sp>
@@ -8628,7 +8627,7 @@
           <a:bodyPr/>
           <a:lstStyle/>
           <a:p>
-            <a:endParaRPr lang="en-US"/>
+            <a:endParaRPr/>
           </a:p>
         </p:txBody>
       </p:sp>
@@ -8680,7 +8679,7 @@
           <a:bodyPr/>
           <a:lstStyle/>
           <a:p>
-            <a:endParaRPr lang="en-US"/>
+            <a:endParaRPr/>
           </a:p>
         </p:txBody>
       </p:sp>
@@ -8735,7 +8734,7 @@
           <a:bodyPr/>
           <a:lstStyle/>
           <a:p>
-            <a:endParaRPr lang="en-US"/>
+            <a:endParaRPr/>
           </a:p>
         </p:txBody>
       </p:sp>
@@ -8787,7 +8786,7 @@
           <a:bodyPr/>
           <a:lstStyle/>
           <a:p>
-            <a:endParaRPr lang="en-US"/>
+            <a:endParaRPr/>
           </a:p>
         </p:txBody>
       </p:sp>
@@ -8842,7 +8841,7 @@
           <a:bodyPr/>
           <a:lstStyle/>
           <a:p>
-            <a:endParaRPr lang="en-US"/>
+            <a:endParaRPr/>
           </a:p>
         </p:txBody>
       </p:sp>
@@ -8884,7 +8883,7 @@
           <a:bodyPr/>
           <a:lstStyle/>
           <a:p>
-            <a:endParaRPr lang="en-US"/>
+            <a:endParaRPr/>
           </a:p>
         </p:txBody>
       </p:sp>
@@ -8924,7 +8923,7 @@
           <a:bodyPr/>
           <a:lstStyle/>
           <a:p>
-            <a:endParaRPr lang="en-US"/>
+            <a:endParaRPr/>
           </a:p>
         </p:txBody>
       </p:sp>
@@ -8966,7 +8965,7 @@
           <a:bodyPr/>
           <a:lstStyle/>
           <a:p>
-            <a:endParaRPr lang="en-US"/>
+            <a:endParaRPr/>
           </a:p>
         </p:txBody>
       </p:sp>
@@ -9006,7 +9005,7 @@
           <a:bodyPr/>
           <a:lstStyle/>
           <a:p>
-            <a:endParaRPr lang="en-US"/>
+            <a:endParaRPr/>
           </a:p>
         </p:txBody>
       </p:sp>
@@ -9048,7 +9047,7 @@
           <a:bodyPr/>
           <a:lstStyle/>
           <a:p>
-            <a:endParaRPr lang="en-US"/>
+            <a:endParaRPr/>
           </a:p>
         </p:txBody>
       </p:sp>
@@ -9088,7 +9087,7 @@
           <a:bodyPr/>
           <a:lstStyle/>
           <a:p>
-            <a:endParaRPr lang="en-US"/>
+            <a:endParaRPr/>
           </a:p>
         </p:txBody>
       </p:sp>
@@ -9130,7 +9129,7 @@
           <a:bodyPr/>
           <a:lstStyle/>
           <a:p>
-            <a:endParaRPr lang="en-US"/>
+            <a:endParaRPr/>
           </a:p>
         </p:txBody>
       </p:sp>
@@ -9170,7 +9169,7 @@
           <a:bodyPr/>
           <a:lstStyle/>
           <a:p>
-            <a:endParaRPr lang="en-US"/>
+            <a:endParaRPr/>
           </a:p>
         </p:txBody>
       </p:sp>
@@ -9212,7 +9211,7 @@
           <a:bodyPr/>
           <a:lstStyle/>
           <a:p>
-            <a:endParaRPr lang="en-US"/>
+            <a:endParaRPr/>
           </a:p>
         </p:txBody>
       </p:sp>
@@ -9252,7 +9251,7 @@
           <a:bodyPr/>
           <a:lstStyle/>
           <a:p>
-            <a:endParaRPr lang="en-US"/>
+            <a:endParaRPr/>
           </a:p>
         </p:txBody>
       </p:sp>
@@ -9294,7 +9293,7 @@
           <a:bodyPr/>
           <a:lstStyle/>
           <a:p>
-            <a:endParaRPr lang="en-US"/>
+            <a:endParaRPr/>
           </a:p>
         </p:txBody>
       </p:sp>
@@ -9334,7 +9333,7 @@
           <a:bodyPr/>
           <a:lstStyle/>
           <a:p>
-            <a:endParaRPr lang="en-US"/>
+            <a:endParaRPr/>
           </a:p>
         </p:txBody>
       </p:sp>
@@ -9376,7 +9375,7 @@
           <a:bodyPr/>
           <a:lstStyle/>
           <a:p>
-            <a:endParaRPr lang="en-US"/>
+            <a:endParaRPr/>
           </a:p>
         </p:txBody>
       </p:sp>
@@ -9416,7 +9415,7 @@
           <a:bodyPr/>
           <a:lstStyle/>
           <a:p>
-            <a:endParaRPr lang="en-US"/>
+            <a:endParaRPr/>
           </a:p>
         </p:txBody>
       </p:sp>
@@ -9458,7 +9457,7 @@
           <a:bodyPr/>
           <a:lstStyle/>
           <a:p>
-            <a:endParaRPr lang="en-US"/>
+            <a:endParaRPr/>
           </a:p>
         </p:txBody>
       </p:sp>
@@ -9498,7 +9497,7 @@
           <a:bodyPr/>
           <a:lstStyle/>
           <a:p>
-            <a:endParaRPr lang="en-US"/>
+            <a:endParaRPr/>
           </a:p>
         </p:txBody>
       </p:sp>
@@ -9540,7 +9539,7 @@
           <a:bodyPr/>
           <a:lstStyle/>
           <a:p>
-            <a:endParaRPr lang="en-US"/>
+            <a:endParaRPr/>
           </a:p>
         </p:txBody>
       </p:sp>
@@ -9580,7 +9579,7 @@
           <a:bodyPr/>
           <a:lstStyle/>
           <a:p>
-            <a:endParaRPr lang="en-US"/>
+            <a:endParaRPr/>
           </a:p>
         </p:txBody>
       </p:sp>
@@ -9622,7 +9621,7 @@
           <a:bodyPr/>
           <a:lstStyle/>
           <a:p>
-            <a:endParaRPr lang="en-US"/>
+            <a:endParaRPr/>
           </a:p>
         </p:txBody>
       </p:sp>
@@ -9662,7 +9661,7 @@
           <a:bodyPr/>
           <a:lstStyle/>
           <a:p>
-            <a:endParaRPr lang="en-US"/>
+            <a:endParaRPr/>
           </a:p>
         </p:txBody>
       </p:sp>
@@ -9836,7 +9835,7 @@
           <a:bodyPr/>
           <a:lstStyle/>
           <a:p>
-            <a:endParaRPr lang="en-US"/>
+            <a:endParaRPr/>
           </a:p>
         </p:txBody>
       </p:sp>
@@ -9891,7 +9890,7 @@
           <a:bodyPr/>
           <a:lstStyle/>
           <a:p>
-            <a:endParaRPr lang="en-US"/>
+            <a:endParaRPr/>
           </a:p>
         </p:txBody>
       </p:sp>
@@ -9946,7 +9945,7 @@
           <a:bodyPr/>
           <a:lstStyle/>
           <a:p>
-            <a:endParaRPr lang="en-US"/>
+            <a:endParaRPr/>
           </a:p>
         </p:txBody>
       </p:sp>
@@ -9998,7 +9997,7 @@
           <a:bodyPr/>
           <a:lstStyle/>
           <a:p>
-            <a:endParaRPr lang="en-US"/>
+            <a:endParaRPr/>
           </a:p>
         </p:txBody>
       </p:sp>
@@ -10053,7 +10052,7 @@
           <a:bodyPr/>
           <a:lstStyle/>
           <a:p>
-            <a:endParaRPr lang="en-US"/>
+            <a:endParaRPr/>
           </a:p>
         </p:txBody>
       </p:sp>
@@ -10108,7 +10107,7 @@
           <a:bodyPr/>
           <a:lstStyle/>
           <a:p>
-            <a:endParaRPr lang="en-US"/>
+            <a:endParaRPr/>
           </a:p>
         </p:txBody>
       </p:sp>
@@ -10215,7 +10214,7 @@
               </a:defRPr>
             </a:pPr>
             <a:r>
-              <a:rPr sz="1350" b="1" dirty="0">
+              <a:rPr sz="1350" b="1">
                 <a:solidFill>
                   <a:srgbClr val="3977B5"/>
                 </a:solidFill>
@@ -10266,7 +10265,7 @@
           <a:bodyPr/>
           <a:lstStyle/>
           <a:p>
-            <a:endParaRPr lang="en-US"/>
+            <a:endParaRPr/>
           </a:p>
         </p:txBody>
       </p:sp>
@@ -10366,7 +10365,7 @@
           <a:bodyPr/>
           <a:lstStyle/>
           <a:p>
-            <a:endParaRPr lang="en-US"/>
+            <a:endParaRPr/>
           </a:p>
         </p:txBody>
       </p:sp>
@@ -10415,7 +10414,7 @@
               </a:defRPr>
             </a:pPr>
             <a:r>
-              <a:rPr sz="1200" dirty="0">
+              <a:rPr sz="1200">
                 <a:solidFill>
                   <a:srgbClr val="202932"/>
                 </a:solidFill>
@@ -10445,7 +10444,7 @@
         <p:spPr>
           <a:xfrm>
             <a:off x="7762876" y="3047999"/>
-            <a:ext cx="7029451" cy="1949886"/>
+            <a:ext cx="7029451" cy="1905000"/>
           </a:xfrm>
           <a:prstGeom prst="roundRect">
             <a:avLst>
@@ -10466,7 +10465,7 @@
           <a:bodyPr/>
           <a:lstStyle/>
           <a:p>
-            <a:endParaRPr lang="en-US"/>
+            <a:endParaRPr/>
           </a:p>
         </p:txBody>
       </p:sp>
@@ -10544,8 +10543,8 @@
         </p:nvSpPr>
         <p:spPr>
           <a:xfrm>
-            <a:off x="171450" y="5181600"/>
-            <a:ext cx="7378922" cy="2010252"/>
+            <a:off x="171450" y="5067300"/>
+            <a:ext cx="7378922" cy="1757363"/>
           </a:xfrm>
           <a:prstGeom prst="roundRect">
             <a:avLst>
@@ -10566,7 +10565,7 @@
           <a:bodyPr/>
           <a:lstStyle/>
           <a:p>
-            <a:endParaRPr lang="en-US" dirty="0"/>
+            <a:endParaRPr/>
           </a:p>
         </p:txBody>
       </p:sp>
@@ -10586,7 +10585,7 @@
         </p:nvSpPr>
         <p:spPr>
           <a:xfrm>
-            <a:off x="323851" y="5249060"/>
+            <a:off x="323851" y="5134760"/>
             <a:ext cx="6953250" cy="317659"/>
           </a:xfrm>
           <a:prstGeom prst="rect">
@@ -10615,7 +10614,7 @@
               </a:defRPr>
             </a:pPr>
             <a:r>
-              <a:rPr sz="1726" b="1" dirty="0">
+              <a:rPr sz="1726" b="1">
                 <a:solidFill>
                   <a:srgbClr val="202932"/>
                 </a:solidFill>
@@ -10644,8 +10643,8 @@
         </p:nvSpPr>
         <p:spPr>
           <a:xfrm>
-            <a:off x="7762875" y="5188387"/>
-            <a:ext cx="7029452" cy="1989028"/>
+            <a:off x="7762875" y="5067300"/>
+            <a:ext cx="7029452" cy="1757363"/>
           </a:xfrm>
           <a:prstGeom prst="roundRect">
             <a:avLst>
@@ -10666,7 +10665,7 @@
           <a:bodyPr/>
           <a:lstStyle/>
           <a:p>
-            <a:endParaRPr lang="en-US"/>
+            <a:endParaRPr/>
           </a:p>
         </p:txBody>
       </p:sp>
@@ -10686,7 +10685,7 @@
         </p:nvSpPr>
         <p:spPr>
           <a:xfrm>
-            <a:off x="7848600" y="5299163"/>
+            <a:off x="7848600" y="5178100"/>
             <a:ext cx="7000876" cy="317659"/>
           </a:xfrm>
           <a:prstGeom prst="rect">
@@ -10773,7 +10772,7 @@
               </a:defRPr>
             </a:pPr>
             <a:r>
-              <a:rPr sz="1200" dirty="0">
+              <a:rPr sz="1200">
                 <a:solidFill>
                   <a:srgbClr val="8A6AB1"/>
                 </a:solidFill>
@@ -10939,7 +10938,7 @@
           <a:bodyPr/>
           <a:lstStyle/>
           <a:p>
-            <a:endParaRPr lang="en-US"/>
+            <a:endParaRPr/>
           </a:p>
         </p:txBody>
       </p:sp>
@@ -11344,7 +11343,7 @@
           <a:bodyPr/>
           <a:lstStyle/>
           <a:p>
-            <a:endParaRPr lang="en-US"/>
+            <a:endParaRPr/>
           </a:p>
         </p:txBody>
       </p:sp>
@@ -11385,7 +11384,7 @@
           <a:bodyPr/>
           <a:lstStyle/>
           <a:p>
-            <a:endParaRPr lang="en-US"/>
+            <a:endParaRPr/>
           </a:p>
         </p:txBody>
       </p:sp>
@@ -11790,7 +11789,7 @@
           <a:bodyPr/>
           <a:lstStyle/>
           <a:p>
-            <a:endParaRPr lang="en-US"/>
+            <a:endParaRPr/>
           </a:p>
         </p:txBody>
       </p:sp>
@@ -11829,7 +11828,7 @@
           <a:bodyPr/>
           <a:lstStyle/>
           <a:p>
-            <a:endParaRPr lang="en-US"/>
+            <a:endParaRPr/>
           </a:p>
         </p:txBody>
       </p:sp>
@@ -11868,7 +11867,7 @@
           <a:bodyPr/>
           <a:lstStyle/>
           <a:p>
-            <a:endParaRPr lang="en-US"/>
+            <a:endParaRPr/>
           </a:p>
         </p:txBody>
       </p:sp>
@@ -11907,7 +11906,7 @@
           <a:bodyPr/>
           <a:lstStyle/>
           <a:p>
-            <a:endParaRPr lang="en-US"/>
+            <a:endParaRPr/>
           </a:p>
         </p:txBody>
       </p:sp>
@@ -11946,7 +11945,7 @@
           <a:bodyPr/>
           <a:lstStyle/>
           <a:p>
-            <a:endParaRPr lang="en-US"/>
+            <a:endParaRPr/>
           </a:p>
         </p:txBody>
       </p:sp>
@@ -11985,7 +11984,7 @@
           <a:bodyPr/>
           <a:lstStyle/>
           <a:p>
-            <a:endParaRPr lang="en-US"/>
+            <a:endParaRPr/>
           </a:p>
         </p:txBody>
       </p:sp>
@@ -12024,7 +12023,7 @@
           <a:bodyPr/>
           <a:lstStyle/>
           <a:p>
-            <a:endParaRPr lang="en-US"/>
+            <a:endParaRPr/>
           </a:p>
         </p:txBody>
       </p:sp>
@@ -12063,7 +12062,7 @@
           <a:bodyPr/>
           <a:lstStyle/>
           <a:p>
-            <a:endParaRPr lang="en-US"/>
+            <a:endParaRPr/>
           </a:p>
         </p:txBody>
       </p:sp>
@@ -12102,7 +12101,7 @@
           <a:bodyPr/>
           <a:lstStyle/>
           <a:p>
-            <a:endParaRPr lang="en-US"/>
+            <a:endParaRPr/>
           </a:p>
         </p:txBody>
       </p:sp>
@@ -12141,7 +12140,7 @@
           <a:bodyPr/>
           <a:lstStyle/>
           <a:p>
-            <a:endParaRPr lang="en-US"/>
+            <a:endParaRPr/>
           </a:p>
         </p:txBody>
       </p:sp>
@@ -12180,7 +12179,7 @@
           <a:bodyPr/>
           <a:lstStyle/>
           <a:p>
-            <a:endParaRPr lang="en-US"/>
+            <a:endParaRPr/>
           </a:p>
         </p:txBody>
       </p:sp>
@@ -12219,7 +12218,7 @@
           <a:bodyPr/>
           <a:lstStyle/>
           <a:p>
-            <a:endParaRPr lang="en-US"/>
+            <a:endParaRPr/>
           </a:p>
         </p:txBody>
       </p:sp>
@@ -12258,7 +12257,7 @@
           <a:bodyPr/>
           <a:lstStyle/>
           <a:p>
-            <a:endParaRPr lang="en-US"/>
+            <a:endParaRPr/>
           </a:p>
         </p:txBody>
       </p:sp>
@@ -12297,7 +12296,7 @@
           <a:bodyPr/>
           <a:lstStyle/>
           <a:p>
-            <a:endParaRPr lang="en-US"/>
+            <a:endParaRPr/>
           </a:p>
         </p:txBody>
       </p:sp>
@@ -12336,7 +12335,7 @@
           <a:bodyPr/>
           <a:lstStyle/>
           <a:p>
-            <a:endParaRPr lang="en-US"/>
+            <a:endParaRPr/>
           </a:p>
         </p:txBody>
       </p:sp>
@@ -12375,7 +12374,7 @@
           <a:bodyPr/>
           <a:lstStyle/>
           <a:p>
-            <a:endParaRPr lang="en-US"/>
+            <a:endParaRPr/>
           </a:p>
         </p:txBody>
       </p:sp>
@@ -12414,7 +12413,7 @@
           <a:bodyPr/>
           <a:lstStyle/>
           <a:p>
-            <a:endParaRPr lang="en-US"/>
+            <a:endParaRPr/>
           </a:p>
         </p:txBody>
       </p:sp>
@@ -12453,7 +12452,7 @@
           <a:bodyPr/>
           <a:lstStyle/>
           <a:p>
-            <a:endParaRPr lang="en-US"/>
+            <a:endParaRPr/>
           </a:p>
         </p:txBody>
       </p:sp>
@@ -12492,7 +12491,7 @@
           <a:bodyPr/>
           <a:lstStyle/>
           <a:p>
-            <a:endParaRPr lang="en-US"/>
+            <a:endParaRPr/>
           </a:p>
         </p:txBody>
       </p:sp>
@@ -12531,7 +12530,7 @@
           <a:bodyPr/>
           <a:lstStyle/>
           <a:p>
-            <a:endParaRPr lang="en-US"/>
+            <a:endParaRPr/>
           </a:p>
         </p:txBody>
       </p:sp>
@@ -12570,7 +12569,7 @@
           <a:bodyPr/>
           <a:lstStyle/>
           <a:p>
-            <a:endParaRPr lang="en-US"/>
+            <a:endParaRPr/>
           </a:p>
         </p:txBody>
       </p:sp>
@@ -12609,7 +12608,7 @@
           <a:bodyPr/>
           <a:lstStyle/>
           <a:p>
-            <a:endParaRPr lang="en-US"/>
+            <a:endParaRPr/>
           </a:p>
         </p:txBody>
       </p:sp>
@@ -12648,7 +12647,7 @@
           <a:bodyPr/>
           <a:lstStyle/>
           <a:p>
-            <a:endParaRPr lang="en-US"/>
+            <a:endParaRPr/>
           </a:p>
         </p:txBody>
       </p:sp>
@@ -12687,7 +12686,7 @@
           <a:bodyPr/>
           <a:lstStyle/>
           <a:p>
-            <a:endParaRPr lang="en-US"/>
+            <a:endParaRPr/>
           </a:p>
         </p:txBody>
       </p:sp>
@@ -12726,7 +12725,7 @@
           <a:bodyPr/>
           <a:lstStyle/>
           <a:p>
-            <a:endParaRPr lang="en-US"/>
+            <a:endParaRPr/>
           </a:p>
         </p:txBody>
       </p:sp>
@@ -12765,7 +12764,7 @@
           <a:bodyPr/>
           <a:lstStyle/>
           <a:p>
-            <a:endParaRPr lang="en-US"/>
+            <a:endParaRPr/>
           </a:p>
         </p:txBody>
       </p:sp>
@@ -12804,7 +12803,7 @@
           <a:bodyPr/>
           <a:lstStyle/>
           <a:p>
-            <a:endParaRPr lang="en-US"/>
+            <a:endParaRPr/>
           </a:p>
         </p:txBody>
       </p:sp>
@@ -12843,7 +12842,7 @@
           <a:bodyPr/>
           <a:lstStyle/>
           <a:p>
-            <a:endParaRPr lang="en-US"/>
+            <a:endParaRPr/>
           </a:p>
         </p:txBody>
       </p:sp>
@@ -12882,7 +12881,7 @@
           <a:bodyPr/>
           <a:lstStyle/>
           <a:p>
-            <a:endParaRPr lang="en-US"/>
+            <a:endParaRPr/>
           </a:p>
         </p:txBody>
       </p:sp>
@@ -12921,7 +12920,7 @@
           <a:bodyPr/>
           <a:lstStyle/>
           <a:p>
-            <a:endParaRPr lang="en-US"/>
+            <a:endParaRPr/>
           </a:p>
         </p:txBody>
       </p:sp>
@@ -12960,7 +12959,7 @@
           <a:bodyPr/>
           <a:lstStyle/>
           <a:p>
-            <a:endParaRPr lang="en-US"/>
+            <a:endParaRPr/>
           </a:p>
         </p:txBody>
       </p:sp>
@@ -12999,7 +12998,7 @@
           <a:bodyPr/>
           <a:lstStyle/>
           <a:p>
-            <a:endParaRPr lang="en-US"/>
+            <a:endParaRPr/>
           </a:p>
         </p:txBody>
       </p:sp>
@@ -13038,7 +13037,7 @@
           <a:bodyPr/>
           <a:lstStyle/>
           <a:p>
-            <a:endParaRPr lang="en-US"/>
+            <a:endParaRPr/>
           </a:p>
         </p:txBody>
       </p:sp>
@@ -13077,7 +13076,7 @@
           <a:bodyPr/>
           <a:lstStyle/>
           <a:p>
-            <a:endParaRPr lang="en-US"/>
+            <a:endParaRPr/>
           </a:p>
         </p:txBody>
       </p:sp>
@@ -13116,7 +13115,7 @@
           <a:bodyPr/>
           <a:lstStyle/>
           <a:p>
-            <a:endParaRPr lang="en-US"/>
+            <a:endParaRPr/>
           </a:p>
         </p:txBody>
       </p:sp>
@@ -13155,7 +13154,7 @@
           <a:bodyPr/>
           <a:lstStyle/>
           <a:p>
-            <a:endParaRPr lang="en-US"/>
+            <a:endParaRPr/>
           </a:p>
         </p:txBody>
       </p:sp>
@@ -13194,7 +13193,7 @@
           <a:bodyPr/>
           <a:lstStyle/>
           <a:p>
-            <a:endParaRPr lang="en-US"/>
+            <a:endParaRPr/>
           </a:p>
         </p:txBody>
       </p:sp>
@@ -13233,7 +13232,7 @@
           <a:bodyPr/>
           <a:lstStyle/>
           <a:p>
-            <a:endParaRPr lang="en-US"/>
+            <a:endParaRPr/>
           </a:p>
         </p:txBody>
       </p:sp>
@@ -13272,7 +13271,7 @@
           <a:bodyPr/>
           <a:lstStyle/>
           <a:p>
-            <a:endParaRPr lang="en-US"/>
+            <a:endParaRPr/>
           </a:p>
         </p:txBody>
       </p:sp>
@@ -13311,7 +13310,7 @@
           <a:bodyPr/>
           <a:lstStyle/>
           <a:p>
-            <a:endParaRPr lang="en-US"/>
+            <a:endParaRPr/>
           </a:p>
         </p:txBody>
       </p:sp>
@@ -13350,7 +13349,7 @@
           <a:bodyPr/>
           <a:lstStyle/>
           <a:p>
-            <a:endParaRPr lang="en-US"/>
+            <a:endParaRPr/>
           </a:p>
         </p:txBody>
       </p:sp>
@@ -13370,7 +13369,7 @@
         </p:nvSpPr>
         <p:spPr>
           <a:xfrm>
-            <a:off x="7981950" y="3461620"/>
+            <a:off x="7981950" y="3652120"/>
             <a:ext cx="1857376" cy="257176"/>
           </a:xfrm>
           <a:prstGeom prst="rect">
@@ -13428,7 +13427,7 @@
         </p:nvSpPr>
         <p:spPr>
           <a:xfrm>
-            <a:off x="10287000" y="3461620"/>
+            <a:off x="10287000" y="3652120"/>
             <a:ext cx="2057400" cy="257176"/>
           </a:xfrm>
           <a:prstGeom prst="rect">
@@ -13486,7 +13485,7 @@
         </p:nvSpPr>
         <p:spPr>
           <a:xfrm>
-            <a:off x="12763500" y="3461620"/>
+            <a:off x="12763500" y="3652120"/>
             <a:ext cx="2028826" cy="257176"/>
           </a:xfrm>
           <a:prstGeom prst="rect">
@@ -13544,7 +13543,7 @@
         </p:nvSpPr>
         <p:spPr>
           <a:xfrm>
-            <a:off x="8020050" y="3766420"/>
+            <a:off x="8020050" y="3956920"/>
             <a:ext cx="1714500" cy="685800"/>
           </a:xfrm>
           <a:prstGeom prst="roundRect">
@@ -13565,7 +13564,7 @@
           <a:bodyPr/>
           <a:lstStyle/>
           <a:p>
-            <a:endParaRPr lang="en-US"/>
+            <a:endParaRPr/>
           </a:p>
         </p:txBody>
       </p:sp>
@@ -13585,7 +13584,7 @@
         </p:nvSpPr>
         <p:spPr>
           <a:xfrm>
-            <a:off x="8067676" y="3848363"/>
+            <a:off x="8067676" y="4038863"/>
             <a:ext cx="1619250" cy="537182"/>
           </a:xfrm>
           <a:custGeom>
@@ -13970,7 +13969,7 @@
           <a:bodyPr/>
           <a:lstStyle/>
           <a:p>
-            <a:endParaRPr lang="en-US"/>
+            <a:endParaRPr/>
           </a:p>
         </p:txBody>
       </p:sp>
@@ -13990,7 +13989,7 @@
         </p:nvSpPr>
         <p:spPr>
           <a:xfrm>
-            <a:off x="9810751" y="4109321"/>
+            <a:off x="9810751" y="4299821"/>
             <a:ext cx="323850" cy="95"/>
           </a:xfrm>
           <a:custGeom>
@@ -14021,7 +14020,7 @@
           <a:bodyPr/>
           <a:lstStyle/>
           <a:p>
-            <a:endParaRPr lang="en-US"/>
+            <a:endParaRPr/>
           </a:p>
         </p:txBody>
       </p:sp>
@@ -14041,7 +14040,7 @@
         </p:nvSpPr>
         <p:spPr>
           <a:xfrm>
-            <a:off x="10048875" y="4071220"/>
+            <a:off x="10048875" y="4261720"/>
             <a:ext cx="85726" cy="76200"/>
           </a:xfrm>
           <a:custGeom>
@@ -14076,7 +14075,7 @@
           <a:bodyPr/>
           <a:lstStyle/>
           <a:p>
-            <a:endParaRPr lang="en-US"/>
+            <a:endParaRPr/>
           </a:p>
         </p:txBody>
       </p:sp>
@@ -14096,7 +14095,7 @@
         </p:nvSpPr>
         <p:spPr>
           <a:xfrm>
-            <a:off x="10334626" y="3766420"/>
+            <a:off x="10334626" y="3956920"/>
             <a:ext cx="1714500" cy="685800"/>
           </a:xfrm>
           <a:prstGeom prst="roundRect">
@@ -14117,7 +14116,7 @@
           <a:bodyPr/>
           <a:lstStyle/>
           <a:p>
-            <a:endParaRPr lang="en-US"/>
+            <a:endParaRPr/>
           </a:p>
         </p:txBody>
       </p:sp>
@@ -14137,7 +14136,7 @@
         </p:nvSpPr>
         <p:spPr>
           <a:xfrm>
-            <a:off x="10382251" y="4027947"/>
+            <a:off x="10382251" y="4218447"/>
             <a:ext cx="1619250" cy="357599"/>
           </a:xfrm>
           <a:custGeom>
@@ -14522,7 +14521,7 @@
           <a:bodyPr/>
           <a:lstStyle/>
           <a:p>
-            <a:endParaRPr lang="en-US"/>
+            <a:endParaRPr/>
           </a:p>
         </p:txBody>
       </p:sp>
@@ -14542,7 +14541,7 @@
         </p:nvSpPr>
         <p:spPr>
           <a:xfrm>
-            <a:off x="12096750" y="4109321"/>
+            <a:off x="12096750" y="4299821"/>
             <a:ext cx="333376" cy="95"/>
           </a:xfrm>
           <a:custGeom>
@@ -14573,7 +14572,7 @@
           <a:bodyPr/>
           <a:lstStyle/>
           <a:p>
-            <a:endParaRPr lang="en-US"/>
+            <a:endParaRPr/>
           </a:p>
         </p:txBody>
       </p:sp>
@@ -14593,7 +14592,7 @@
         </p:nvSpPr>
         <p:spPr>
           <a:xfrm>
-            <a:off x="12344400" y="4071220"/>
+            <a:off x="12344400" y="4261720"/>
             <a:ext cx="85726" cy="76200"/>
           </a:xfrm>
           <a:custGeom>
@@ -14628,7 +14627,7 @@
           <a:bodyPr/>
           <a:lstStyle/>
           <a:p>
-            <a:endParaRPr lang="en-US"/>
+            <a:endParaRPr/>
           </a:p>
         </p:txBody>
       </p:sp>
@@ -14648,7 +14647,7 @@
         </p:nvSpPr>
         <p:spPr>
           <a:xfrm>
-            <a:off x="12620626" y="3766420"/>
+            <a:off x="12620626" y="3956920"/>
             <a:ext cx="1981200" cy="685800"/>
           </a:xfrm>
           <a:prstGeom prst="roundRect">
@@ -14669,7 +14668,7 @@
           <a:bodyPr/>
           <a:lstStyle/>
           <a:p>
-            <a:endParaRPr lang="en-US"/>
+            <a:endParaRPr/>
           </a:p>
         </p:txBody>
       </p:sp>
@@ -14689,7 +14688,7 @@
         </p:nvSpPr>
         <p:spPr>
           <a:xfrm>
-            <a:off x="12668251" y="3956184"/>
+            <a:off x="12668251" y="4146684"/>
             <a:ext cx="1885950" cy="429362"/>
           </a:xfrm>
           <a:custGeom>
@@ -15074,7 +15073,7 @@
           <a:bodyPr/>
           <a:lstStyle/>
           <a:p>
-            <a:endParaRPr lang="en-US"/>
+            <a:endParaRPr/>
           </a:p>
         </p:txBody>
       </p:sp>
@@ -15094,7 +15093,7 @@
         </p:nvSpPr>
         <p:spPr>
           <a:xfrm>
-            <a:off x="12668251" y="4102975"/>
+            <a:off x="12668251" y="4293475"/>
             <a:ext cx="1885950" cy="282570"/>
           </a:xfrm>
           <a:custGeom>
@@ -15479,7 +15478,7 @@
           <a:bodyPr/>
           <a:lstStyle/>
           <a:p>
-            <a:endParaRPr lang="en-US"/>
+            <a:endParaRPr/>
           </a:p>
         </p:txBody>
       </p:sp>
@@ -15499,7 +15498,7 @@
         </p:nvSpPr>
         <p:spPr>
           <a:xfrm>
-            <a:off x="371475" y="5725310"/>
+            <a:off x="371475" y="5706260"/>
             <a:ext cx="962026" cy="514350"/>
           </a:xfrm>
           <a:prstGeom prst="roundRect">
@@ -15520,7 +15519,7 @@
           <a:bodyPr/>
           <a:lstStyle/>
           <a:p>
-            <a:endParaRPr lang="en-US"/>
+            <a:endParaRPr/>
           </a:p>
         </p:txBody>
       </p:sp>
@@ -15540,7 +15539,7 @@
         </p:nvSpPr>
         <p:spPr>
           <a:xfrm>
-            <a:off x="419100" y="5796958"/>
+            <a:off x="419100" y="5777908"/>
             <a:ext cx="866776" cy="376027"/>
           </a:xfrm>
           <a:custGeom>
@@ -15925,7 +15924,7 @@
           <a:bodyPr/>
           <a:lstStyle/>
           <a:p>
-            <a:endParaRPr lang="en-US"/>
+            <a:endParaRPr/>
           </a:p>
         </p:txBody>
       </p:sp>
@@ -15945,7 +15944,7 @@
         </p:nvSpPr>
         <p:spPr>
           <a:xfrm>
-            <a:off x="342900" y="6306335"/>
+            <a:off x="342900" y="6287285"/>
             <a:ext cx="1190626" cy="242888"/>
           </a:xfrm>
           <a:prstGeom prst="rect">
@@ -16003,7 +16002,7 @@
         </p:nvSpPr>
         <p:spPr>
           <a:xfrm>
-            <a:off x="1381124" y="6011059"/>
+            <a:off x="1381124" y="5992009"/>
             <a:ext cx="342900" cy="95"/>
           </a:xfrm>
           <a:custGeom>
@@ -16034,7 +16033,7 @@
           <a:bodyPr/>
           <a:lstStyle/>
           <a:p>
-            <a:endParaRPr lang="en-US"/>
+            <a:endParaRPr/>
           </a:p>
         </p:txBody>
       </p:sp>
@@ -16054,7 +16053,7 @@
         </p:nvSpPr>
         <p:spPr>
           <a:xfrm>
-            <a:off x="1638300" y="5972959"/>
+            <a:off x="1638300" y="5953909"/>
             <a:ext cx="85726" cy="76200"/>
           </a:xfrm>
           <a:custGeom>
@@ -16089,7 +16088,7 @@
           <a:bodyPr/>
           <a:lstStyle/>
           <a:p>
-            <a:endParaRPr lang="en-US"/>
+            <a:endParaRPr/>
           </a:p>
         </p:txBody>
       </p:sp>
@@ -16109,7 +16108,7 @@
         </p:nvSpPr>
         <p:spPr>
           <a:xfrm>
-            <a:off x="1828801" y="5887234"/>
+            <a:off x="1828801" y="5868184"/>
             <a:ext cx="95250" cy="247650"/>
           </a:xfrm>
           <a:prstGeom prst="rect">
@@ -16128,7 +16127,7 @@
           <a:bodyPr/>
           <a:lstStyle/>
           <a:p>
-            <a:endParaRPr lang="en-US"/>
+            <a:endParaRPr/>
           </a:p>
         </p:txBody>
       </p:sp>
@@ -16148,7 +16147,7 @@
         </p:nvSpPr>
         <p:spPr>
           <a:xfrm>
-            <a:off x="1952625" y="5887234"/>
+            <a:off x="1952625" y="5868184"/>
             <a:ext cx="95250" cy="247650"/>
           </a:xfrm>
           <a:prstGeom prst="rect">
@@ -16167,7 +16166,7 @@
           <a:bodyPr/>
           <a:lstStyle/>
           <a:p>
-            <a:endParaRPr lang="en-US"/>
+            <a:endParaRPr/>
           </a:p>
         </p:txBody>
       </p:sp>
@@ -16187,7 +16186,7 @@
         </p:nvSpPr>
         <p:spPr>
           <a:xfrm>
-            <a:off x="2076451" y="5887234"/>
+            <a:off x="2076451" y="5868184"/>
             <a:ext cx="95250" cy="247650"/>
           </a:xfrm>
           <a:prstGeom prst="rect">
@@ -16206,7 +16205,7 @@
           <a:bodyPr/>
           <a:lstStyle/>
           <a:p>
-            <a:endParaRPr lang="en-US"/>
+            <a:endParaRPr/>
           </a:p>
         </p:txBody>
       </p:sp>
@@ -16226,7 +16225,7 @@
         </p:nvSpPr>
         <p:spPr>
           <a:xfrm>
-            <a:off x="2200275" y="5887234"/>
+            <a:off x="2200275" y="5868184"/>
             <a:ext cx="95250" cy="247650"/>
           </a:xfrm>
           <a:prstGeom prst="rect">
@@ -16245,7 +16244,7 @@
           <a:bodyPr/>
           <a:lstStyle/>
           <a:p>
-            <a:endParaRPr lang="en-US"/>
+            <a:endParaRPr/>
           </a:p>
         </p:txBody>
       </p:sp>
@@ -16265,7 +16264,7 @@
         </p:nvSpPr>
         <p:spPr>
           <a:xfrm>
-            <a:off x="2324101" y="5887234"/>
+            <a:off x="2324101" y="5868184"/>
             <a:ext cx="95250" cy="247650"/>
           </a:xfrm>
           <a:prstGeom prst="rect">
@@ -16284,7 +16283,7 @@
           <a:bodyPr/>
           <a:lstStyle/>
           <a:p>
-            <a:endParaRPr lang="en-US"/>
+            <a:endParaRPr/>
           </a:p>
         </p:txBody>
       </p:sp>
@@ -16304,7 +16303,7 @@
         </p:nvSpPr>
         <p:spPr>
           <a:xfrm>
-            <a:off x="2447925" y="5887234"/>
+            <a:off x="2447925" y="5868184"/>
             <a:ext cx="95250" cy="247650"/>
           </a:xfrm>
           <a:prstGeom prst="rect">
@@ -16323,7 +16322,7 @@
           <a:bodyPr/>
           <a:lstStyle/>
           <a:p>
-            <a:endParaRPr lang="en-US"/>
+            <a:endParaRPr/>
           </a:p>
         </p:txBody>
       </p:sp>
@@ -16343,7 +16342,7 @@
         </p:nvSpPr>
         <p:spPr>
           <a:xfrm>
-            <a:off x="1733550" y="6306335"/>
+            <a:off x="1733550" y="6287285"/>
             <a:ext cx="1028700" cy="242888"/>
           </a:xfrm>
           <a:prstGeom prst="rect">
@@ -16401,7 +16400,7 @@
         </p:nvSpPr>
         <p:spPr>
           <a:xfrm>
-            <a:off x="2619376" y="6011059"/>
+            <a:off x="2619376" y="5992009"/>
             <a:ext cx="342900" cy="95"/>
           </a:xfrm>
           <a:custGeom>
@@ -16432,7 +16431,7 @@
           <a:bodyPr/>
           <a:lstStyle/>
           <a:p>
-            <a:endParaRPr lang="en-US"/>
+            <a:endParaRPr/>
           </a:p>
         </p:txBody>
       </p:sp>
@@ -16452,7 +16451,7 @@
         </p:nvSpPr>
         <p:spPr>
           <a:xfrm>
-            <a:off x="2876550" y="5972959"/>
+            <a:off x="2876550" y="5953909"/>
             <a:ext cx="85726" cy="76200"/>
           </a:xfrm>
           <a:custGeom>
@@ -16487,7 +16486,7 @@
           <a:bodyPr/>
           <a:lstStyle/>
           <a:p>
-            <a:endParaRPr lang="en-US"/>
+            <a:endParaRPr/>
           </a:p>
         </p:txBody>
       </p:sp>
@@ -16507,7 +16506,7 @@
         </p:nvSpPr>
         <p:spPr>
           <a:xfrm>
-            <a:off x="3048000" y="5706259"/>
+            <a:off x="3048000" y="5687209"/>
             <a:ext cx="161926" cy="161926"/>
           </a:xfrm>
           <a:prstGeom prst="rect">
@@ -16526,7 +16525,7 @@
           <a:bodyPr/>
           <a:lstStyle/>
           <a:p>
-            <a:endParaRPr lang="en-US"/>
+            <a:endParaRPr/>
           </a:p>
         </p:txBody>
       </p:sp>
@@ -16546,7 +16545,7 @@
         </p:nvSpPr>
         <p:spPr>
           <a:xfrm>
-            <a:off x="3219450" y="5706259"/>
+            <a:off x="3219450" y="5687209"/>
             <a:ext cx="161926" cy="161926"/>
           </a:xfrm>
           <a:prstGeom prst="rect">
@@ -16565,7 +16564,7 @@
           <a:bodyPr/>
           <a:lstStyle/>
           <a:p>
-            <a:endParaRPr lang="en-US"/>
+            <a:endParaRPr/>
           </a:p>
         </p:txBody>
       </p:sp>
@@ -16585,7 +16584,7 @@
         </p:nvSpPr>
         <p:spPr>
           <a:xfrm>
-            <a:off x="3248026" y="5734834"/>
+            <a:off x="3248026" y="5715784"/>
             <a:ext cx="104776" cy="104776"/>
           </a:xfrm>
           <a:custGeom>
@@ -16616,7 +16615,7 @@
           <a:bodyPr/>
           <a:lstStyle/>
           <a:p>
-            <a:endParaRPr lang="en-US"/>
+            <a:endParaRPr/>
           </a:p>
         </p:txBody>
       </p:sp>
@@ -16636,7 +16635,7 @@
         </p:nvSpPr>
         <p:spPr>
           <a:xfrm>
-            <a:off x="3390900" y="5706259"/>
+            <a:off x="3390900" y="5687209"/>
             <a:ext cx="161926" cy="161926"/>
           </a:xfrm>
           <a:prstGeom prst="rect">
@@ -16655,7 +16654,7 @@
           <a:bodyPr/>
           <a:lstStyle/>
           <a:p>
-            <a:endParaRPr lang="en-US"/>
+            <a:endParaRPr/>
           </a:p>
         </p:txBody>
       </p:sp>
@@ -16675,7 +16674,7 @@
         </p:nvSpPr>
         <p:spPr>
           <a:xfrm>
-            <a:off x="3562350" y="5706259"/>
+            <a:off x="3562350" y="5687209"/>
             <a:ext cx="161926" cy="161926"/>
           </a:xfrm>
           <a:prstGeom prst="rect">
@@ -16694,7 +16693,7 @@
           <a:bodyPr/>
           <a:lstStyle/>
           <a:p>
-            <a:endParaRPr lang="en-US"/>
+            <a:endParaRPr/>
           </a:p>
         </p:txBody>
       </p:sp>
@@ -16714,7 +16713,7 @@
         </p:nvSpPr>
         <p:spPr>
           <a:xfrm>
-            <a:off x="3733800" y="5706259"/>
+            <a:off x="3733800" y="5687209"/>
             <a:ext cx="161926" cy="161926"/>
           </a:xfrm>
           <a:prstGeom prst="rect">
@@ -16733,7 +16732,7 @@
           <a:bodyPr/>
           <a:lstStyle/>
           <a:p>
-            <a:endParaRPr lang="en-US"/>
+            <a:endParaRPr/>
           </a:p>
         </p:txBody>
       </p:sp>
@@ -16753,7 +16752,7 @@
         </p:nvSpPr>
         <p:spPr>
           <a:xfrm>
-            <a:off x="3905250" y="5706259"/>
+            <a:off x="3905250" y="5687209"/>
             <a:ext cx="161926" cy="161926"/>
           </a:xfrm>
           <a:prstGeom prst="rect">
@@ -16772,7 +16771,7 @@
           <a:bodyPr/>
           <a:lstStyle/>
           <a:p>
-            <a:endParaRPr lang="en-US"/>
+            <a:endParaRPr/>
           </a:p>
         </p:txBody>
       </p:sp>
@@ -16792,7 +16791,7 @@
         </p:nvSpPr>
         <p:spPr>
           <a:xfrm>
-            <a:off x="4076700" y="5706259"/>
+            <a:off x="4076700" y="5687209"/>
             <a:ext cx="161926" cy="161926"/>
           </a:xfrm>
           <a:prstGeom prst="rect">
@@ -16811,7 +16810,7 @@
           <a:bodyPr/>
           <a:lstStyle/>
           <a:p>
-            <a:endParaRPr lang="en-US"/>
+            <a:endParaRPr/>
           </a:p>
         </p:txBody>
       </p:sp>
@@ -16831,7 +16830,7 @@
         </p:nvSpPr>
         <p:spPr>
           <a:xfrm>
-            <a:off x="3048000" y="5877709"/>
+            <a:off x="3048000" y="5858659"/>
             <a:ext cx="161926" cy="161926"/>
           </a:xfrm>
           <a:prstGeom prst="rect">
@@ -16850,7 +16849,7 @@
           <a:bodyPr/>
           <a:lstStyle/>
           <a:p>
-            <a:endParaRPr lang="en-US"/>
+            <a:endParaRPr/>
           </a:p>
         </p:txBody>
       </p:sp>
@@ -16870,7 +16869,7 @@
         </p:nvSpPr>
         <p:spPr>
           <a:xfrm>
-            <a:off x="3219450" y="5877709"/>
+            <a:off x="3219450" y="5858659"/>
             <a:ext cx="161926" cy="161926"/>
           </a:xfrm>
           <a:prstGeom prst="rect">
@@ -16889,7 +16888,7 @@
           <a:bodyPr/>
           <a:lstStyle/>
           <a:p>
-            <a:endParaRPr lang="en-US"/>
+            <a:endParaRPr/>
           </a:p>
         </p:txBody>
       </p:sp>
@@ -16909,7 +16908,7 @@
         </p:nvSpPr>
         <p:spPr>
           <a:xfrm>
-            <a:off x="3248026" y="5906284"/>
+            <a:off x="3248026" y="5887234"/>
             <a:ext cx="104776" cy="104776"/>
           </a:xfrm>
           <a:custGeom>
@@ -16940,7 +16939,7 @@
           <a:bodyPr/>
           <a:lstStyle/>
           <a:p>
-            <a:endParaRPr lang="en-US"/>
+            <a:endParaRPr/>
           </a:p>
         </p:txBody>
       </p:sp>
@@ -16960,7 +16959,7 @@
         </p:nvSpPr>
         <p:spPr>
           <a:xfrm>
-            <a:off x="3390900" y="5877709"/>
+            <a:off x="3390900" y="5858659"/>
             <a:ext cx="161926" cy="161926"/>
           </a:xfrm>
           <a:prstGeom prst="rect">
@@ -16979,7 +16978,7 @@
           <a:bodyPr/>
           <a:lstStyle/>
           <a:p>
-            <a:endParaRPr lang="en-US"/>
+            <a:endParaRPr/>
           </a:p>
         </p:txBody>
       </p:sp>
@@ -16999,7 +16998,7 @@
         </p:nvSpPr>
         <p:spPr>
           <a:xfrm>
-            <a:off x="3562350" y="5877709"/>
+            <a:off x="3562350" y="5858659"/>
             <a:ext cx="161926" cy="161926"/>
           </a:xfrm>
           <a:prstGeom prst="rect">
@@ -17018,7 +17017,7 @@
           <a:bodyPr/>
           <a:lstStyle/>
           <a:p>
-            <a:endParaRPr lang="en-US"/>
+            <a:endParaRPr/>
           </a:p>
         </p:txBody>
       </p:sp>
@@ -17038,7 +17037,7 @@
         </p:nvSpPr>
         <p:spPr>
           <a:xfrm>
-            <a:off x="3733800" y="5877709"/>
+            <a:off x="3733800" y="5858659"/>
             <a:ext cx="161926" cy="161926"/>
           </a:xfrm>
           <a:prstGeom prst="rect">
@@ -17057,7 +17056,7 @@
           <a:bodyPr/>
           <a:lstStyle/>
           <a:p>
-            <a:endParaRPr lang="en-US"/>
+            <a:endParaRPr/>
           </a:p>
         </p:txBody>
       </p:sp>
@@ -17077,7 +17076,7 @@
         </p:nvSpPr>
         <p:spPr>
           <a:xfrm>
-            <a:off x="3905250" y="5877709"/>
+            <a:off x="3905250" y="5858659"/>
             <a:ext cx="161926" cy="161926"/>
           </a:xfrm>
           <a:prstGeom prst="rect">
@@ -17096,7 +17095,7 @@
           <a:bodyPr/>
           <a:lstStyle/>
           <a:p>
-            <a:endParaRPr lang="en-US"/>
+            <a:endParaRPr/>
           </a:p>
         </p:txBody>
       </p:sp>
@@ -17116,7 +17115,7 @@
         </p:nvSpPr>
         <p:spPr>
           <a:xfrm>
-            <a:off x="4076700" y="5877709"/>
+            <a:off x="4076700" y="5858659"/>
             <a:ext cx="161926" cy="161926"/>
           </a:xfrm>
           <a:prstGeom prst="rect">
@@ -17135,7 +17134,7 @@
           <a:bodyPr/>
           <a:lstStyle/>
           <a:p>
-            <a:endParaRPr lang="en-US"/>
+            <a:endParaRPr/>
           </a:p>
         </p:txBody>
       </p:sp>
@@ -17155,7 +17154,7 @@
         </p:nvSpPr>
         <p:spPr>
           <a:xfrm>
-            <a:off x="3048000" y="6049159"/>
+            <a:off x="3048000" y="6030109"/>
             <a:ext cx="161926" cy="161926"/>
           </a:xfrm>
           <a:prstGeom prst="rect">
@@ -17174,7 +17173,7 @@
           <a:bodyPr/>
           <a:lstStyle/>
           <a:p>
-            <a:endParaRPr lang="en-US"/>
+            <a:endParaRPr/>
           </a:p>
         </p:txBody>
       </p:sp>
@@ -17194,7 +17193,7 @@
         </p:nvSpPr>
         <p:spPr>
           <a:xfrm>
-            <a:off x="3219450" y="6049159"/>
+            <a:off x="3219450" y="6030109"/>
             <a:ext cx="161926" cy="161926"/>
           </a:xfrm>
           <a:prstGeom prst="rect">
@@ -17213,7 +17212,7 @@
           <a:bodyPr/>
           <a:lstStyle/>
           <a:p>
-            <a:endParaRPr lang="en-US"/>
+            <a:endParaRPr/>
           </a:p>
         </p:txBody>
       </p:sp>
@@ -17233,7 +17232,7 @@
         </p:nvSpPr>
         <p:spPr>
           <a:xfrm>
-            <a:off x="3248026" y="6077734"/>
+            <a:off x="3248026" y="6058684"/>
             <a:ext cx="104776" cy="104776"/>
           </a:xfrm>
           <a:custGeom>
@@ -17264,7 +17263,7 @@
           <a:bodyPr/>
           <a:lstStyle/>
           <a:p>
-            <a:endParaRPr lang="en-US"/>
+            <a:endParaRPr/>
           </a:p>
         </p:txBody>
       </p:sp>
@@ -17284,7 +17283,7 @@
         </p:nvSpPr>
         <p:spPr>
           <a:xfrm>
-            <a:off x="3390900" y="6049159"/>
+            <a:off x="3390900" y="6030109"/>
             <a:ext cx="161926" cy="161926"/>
           </a:xfrm>
           <a:prstGeom prst="rect">
@@ -17303,7 +17302,7 @@
           <a:bodyPr/>
           <a:lstStyle/>
           <a:p>
-            <a:endParaRPr lang="en-US"/>
+            <a:endParaRPr/>
           </a:p>
         </p:txBody>
       </p:sp>
@@ -17323,7 +17322,7 @@
         </p:nvSpPr>
         <p:spPr>
           <a:xfrm>
-            <a:off x="3562350" y="6049159"/>
+            <a:off x="3562350" y="6030109"/>
             <a:ext cx="161926" cy="161926"/>
           </a:xfrm>
           <a:prstGeom prst="rect">
@@ -17342,7 +17341,7 @@
           <a:bodyPr/>
           <a:lstStyle/>
           <a:p>
-            <a:endParaRPr lang="en-US"/>
+            <a:endParaRPr/>
           </a:p>
         </p:txBody>
       </p:sp>
@@ -17362,7 +17361,7 @@
         </p:nvSpPr>
         <p:spPr>
           <a:xfrm>
-            <a:off x="3733800" y="6049159"/>
+            <a:off x="3733800" y="6030109"/>
             <a:ext cx="161926" cy="161926"/>
           </a:xfrm>
           <a:prstGeom prst="rect">
@@ -17381,7 +17380,7 @@
           <a:bodyPr/>
           <a:lstStyle/>
           <a:p>
-            <a:endParaRPr lang="en-US"/>
+            <a:endParaRPr/>
           </a:p>
         </p:txBody>
       </p:sp>
@@ -17401,7 +17400,7 @@
         </p:nvSpPr>
         <p:spPr>
           <a:xfrm>
-            <a:off x="3905250" y="6049159"/>
+            <a:off x="3905250" y="6030109"/>
             <a:ext cx="161926" cy="161926"/>
           </a:xfrm>
           <a:prstGeom prst="rect">
@@ -17420,7 +17419,7 @@
           <a:bodyPr/>
           <a:lstStyle/>
           <a:p>
-            <a:endParaRPr lang="en-US"/>
+            <a:endParaRPr/>
           </a:p>
         </p:txBody>
       </p:sp>
@@ -17440,7 +17439,7 @@
         </p:nvSpPr>
         <p:spPr>
           <a:xfrm>
-            <a:off x="4076700" y="6049159"/>
+            <a:off x="4076700" y="6030109"/>
             <a:ext cx="161926" cy="161926"/>
           </a:xfrm>
           <a:prstGeom prst="rect">
@@ -17459,7 +17458,7 @@
           <a:bodyPr/>
           <a:lstStyle/>
           <a:p>
-            <a:endParaRPr lang="en-US"/>
+            <a:endParaRPr/>
           </a:p>
         </p:txBody>
       </p:sp>
@@ -17479,7 +17478,7 @@
         </p:nvSpPr>
         <p:spPr>
           <a:xfrm>
-            <a:off x="3048000" y="6220609"/>
+            <a:off x="3048000" y="6201559"/>
             <a:ext cx="161926" cy="161926"/>
           </a:xfrm>
           <a:prstGeom prst="rect">
@@ -17498,7 +17497,7 @@
           <a:bodyPr/>
           <a:lstStyle/>
           <a:p>
-            <a:endParaRPr lang="en-US"/>
+            <a:endParaRPr/>
           </a:p>
         </p:txBody>
       </p:sp>
@@ -17518,7 +17517,7 @@
         </p:nvSpPr>
         <p:spPr>
           <a:xfrm>
-            <a:off x="3219450" y="6220609"/>
+            <a:off x="3219450" y="6201559"/>
             <a:ext cx="161926" cy="161926"/>
           </a:xfrm>
           <a:prstGeom prst="rect">
@@ -17537,7 +17536,7 @@
           <a:bodyPr/>
           <a:lstStyle/>
           <a:p>
-            <a:endParaRPr lang="en-US"/>
+            <a:endParaRPr/>
           </a:p>
         </p:txBody>
       </p:sp>
@@ -17557,7 +17556,7 @@
         </p:nvSpPr>
         <p:spPr>
           <a:xfrm>
-            <a:off x="3248026" y="6249184"/>
+            <a:off x="3248026" y="6230134"/>
             <a:ext cx="104776" cy="104776"/>
           </a:xfrm>
           <a:custGeom>
@@ -17588,7 +17587,7 @@
           <a:bodyPr/>
           <a:lstStyle/>
           <a:p>
-            <a:endParaRPr lang="en-US"/>
+            <a:endParaRPr/>
           </a:p>
         </p:txBody>
       </p:sp>
@@ -17608,7 +17607,7 @@
         </p:nvSpPr>
         <p:spPr>
           <a:xfrm>
-            <a:off x="3390900" y="6220609"/>
+            <a:off x="3390900" y="6201559"/>
             <a:ext cx="161926" cy="161926"/>
           </a:xfrm>
           <a:prstGeom prst="rect">
@@ -17627,7 +17626,7 @@
           <a:bodyPr/>
           <a:lstStyle/>
           <a:p>
-            <a:endParaRPr lang="en-US"/>
+            <a:endParaRPr/>
           </a:p>
         </p:txBody>
       </p:sp>
@@ -17647,7 +17646,7 @@
         </p:nvSpPr>
         <p:spPr>
           <a:xfrm>
-            <a:off x="3562350" y="6220609"/>
+            <a:off x="3562350" y="6201559"/>
             <a:ext cx="161926" cy="161926"/>
           </a:xfrm>
           <a:prstGeom prst="rect">
@@ -17666,7 +17665,7 @@
           <a:bodyPr/>
           <a:lstStyle/>
           <a:p>
-            <a:endParaRPr lang="en-US"/>
+            <a:endParaRPr/>
           </a:p>
         </p:txBody>
       </p:sp>
@@ -17686,7 +17685,7 @@
         </p:nvSpPr>
         <p:spPr>
           <a:xfrm>
-            <a:off x="3733800" y="6220609"/>
+            <a:off x="3733800" y="6201559"/>
             <a:ext cx="161926" cy="161926"/>
           </a:xfrm>
           <a:prstGeom prst="rect">
@@ -17705,7 +17704,7 @@
           <a:bodyPr/>
           <a:lstStyle/>
           <a:p>
-            <a:endParaRPr lang="en-US"/>
+            <a:endParaRPr/>
           </a:p>
         </p:txBody>
       </p:sp>
@@ -17725,7 +17724,7 @@
         </p:nvSpPr>
         <p:spPr>
           <a:xfrm>
-            <a:off x="3905250" y="6220609"/>
+            <a:off x="3905250" y="6201559"/>
             <a:ext cx="161926" cy="161926"/>
           </a:xfrm>
           <a:prstGeom prst="rect">
@@ -17744,7 +17743,7 @@
           <a:bodyPr/>
           <a:lstStyle/>
           <a:p>
-            <a:endParaRPr lang="en-US"/>
+            <a:endParaRPr/>
           </a:p>
         </p:txBody>
       </p:sp>
@@ -17764,7 +17763,7 @@
         </p:nvSpPr>
         <p:spPr>
           <a:xfrm>
-            <a:off x="4076700" y="6220609"/>
+            <a:off x="4076700" y="6201559"/>
             <a:ext cx="161926" cy="161926"/>
           </a:xfrm>
           <a:prstGeom prst="rect">
@@ -17783,7 +17782,7 @@
           <a:bodyPr/>
           <a:lstStyle/>
           <a:p>
-            <a:endParaRPr lang="en-US"/>
+            <a:endParaRPr/>
           </a:p>
         </p:txBody>
       </p:sp>
@@ -17803,7 +17802,7 @@
         </p:nvSpPr>
         <p:spPr>
           <a:xfrm>
-            <a:off x="2933701" y="6420634"/>
+            <a:off x="2933701" y="6401584"/>
             <a:ext cx="1619250" cy="228600"/>
           </a:xfrm>
           <a:prstGeom prst="rect">
@@ -17861,7 +17860,7 @@
         </p:nvSpPr>
         <p:spPr>
           <a:xfrm>
-            <a:off x="4429126" y="5525284"/>
+            <a:off x="4429126" y="5506234"/>
             <a:ext cx="2857500" cy="228600"/>
           </a:xfrm>
           <a:prstGeom prst="rect">
@@ -17919,7 +17918,7 @@
         </p:nvSpPr>
         <p:spPr>
           <a:xfrm>
-            <a:off x="4343401" y="6039635"/>
+            <a:off x="4343401" y="6020585"/>
             <a:ext cx="361950" cy="95"/>
           </a:xfrm>
           <a:custGeom>
@@ -17950,7 +17949,7 @@
           <a:bodyPr/>
           <a:lstStyle/>
           <a:p>
-            <a:endParaRPr lang="en-US"/>
+            <a:endParaRPr/>
           </a:p>
         </p:txBody>
       </p:sp>
@@ -17970,7 +17969,7 @@
         </p:nvSpPr>
         <p:spPr>
           <a:xfrm>
-            <a:off x="4619625" y="6001534"/>
+            <a:off x="4619625" y="5982484"/>
             <a:ext cx="85726" cy="76200"/>
           </a:xfrm>
           <a:custGeom>
@@ -18005,7 +18004,7 @@
           <a:bodyPr/>
           <a:lstStyle/>
           <a:p>
-            <a:endParaRPr lang="en-US"/>
+            <a:endParaRPr/>
           </a:p>
         </p:txBody>
       </p:sp>
@@ -18025,7 +18024,7 @@
         </p:nvSpPr>
         <p:spPr>
           <a:xfrm>
-            <a:off x="4857751" y="5915810"/>
+            <a:off x="4857751" y="5896760"/>
             <a:ext cx="95250" cy="247650"/>
           </a:xfrm>
           <a:prstGeom prst="rect">
@@ -18044,7 +18043,7 @@
           <a:bodyPr/>
           <a:lstStyle/>
           <a:p>
-            <a:endParaRPr lang="en-US"/>
+            <a:endParaRPr/>
           </a:p>
         </p:txBody>
       </p:sp>
@@ -18064,7 +18063,7 @@
         </p:nvSpPr>
         <p:spPr>
           <a:xfrm>
-            <a:off x="4981576" y="5915810"/>
+            <a:off x="4981576" y="5896760"/>
             <a:ext cx="95250" cy="247650"/>
           </a:xfrm>
           <a:prstGeom prst="rect">
@@ -18083,7 +18082,7 @@
           <a:bodyPr/>
           <a:lstStyle/>
           <a:p>
-            <a:endParaRPr lang="en-US"/>
+            <a:endParaRPr/>
           </a:p>
         </p:txBody>
       </p:sp>
@@ -18103,7 +18102,7 @@
         </p:nvSpPr>
         <p:spPr>
           <a:xfrm>
-            <a:off x="5105401" y="5915810"/>
+            <a:off x="5105401" y="5896760"/>
             <a:ext cx="95250" cy="247650"/>
           </a:xfrm>
           <a:prstGeom prst="rect">
@@ -18122,7 +18121,7 @@
           <a:bodyPr/>
           <a:lstStyle/>
           <a:p>
-            <a:endParaRPr lang="en-US"/>
+            <a:endParaRPr/>
           </a:p>
         </p:txBody>
       </p:sp>
@@ -18142,7 +18141,7 @@
         </p:nvSpPr>
         <p:spPr>
           <a:xfrm>
-            <a:off x="5229226" y="5915810"/>
+            <a:off x="5229226" y="5896760"/>
             <a:ext cx="95250" cy="247650"/>
           </a:xfrm>
           <a:prstGeom prst="rect">
@@ -18161,7 +18160,7 @@
           <a:bodyPr/>
           <a:lstStyle/>
           <a:p>
-            <a:endParaRPr lang="en-US"/>
+            <a:endParaRPr/>
           </a:p>
         </p:txBody>
       </p:sp>
@@ -18181,7 +18180,7 @@
         </p:nvSpPr>
         <p:spPr>
           <a:xfrm>
-            <a:off x="5353051" y="5915810"/>
+            <a:off x="5353051" y="5896760"/>
             <a:ext cx="95250" cy="247650"/>
           </a:xfrm>
           <a:prstGeom prst="rect">
@@ -18200,7 +18199,7 @@
           <a:bodyPr/>
           <a:lstStyle/>
           <a:p>
-            <a:endParaRPr lang="en-US"/>
+            <a:endParaRPr/>
           </a:p>
         </p:txBody>
       </p:sp>
@@ -18220,7 +18219,7 @@
         </p:nvSpPr>
         <p:spPr>
           <a:xfrm>
-            <a:off x="5505451" y="6039635"/>
+            <a:off x="5505451" y="6020585"/>
             <a:ext cx="400050" cy="95"/>
           </a:xfrm>
           <a:custGeom>
@@ -18251,7 +18250,7 @@
           <a:bodyPr/>
           <a:lstStyle/>
           <a:p>
-            <a:endParaRPr lang="en-US"/>
+            <a:endParaRPr/>
           </a:p>
         </p:txBody>
       </p:sp>
@@ -18271,7 +18270,7 @@
         </p:nvSpPr>
         <p:spPr>
           <a:xfrm>
-            <a:off x="5819775" y="6001534"/>
+            <a:off x="5819775" y="5982484"/>
             <a:ext cx="85726" cy="76200"/>
           </a:xfrm>
           <a:custGeom>
@@ -18306,7 +18305,7 @@
           <a:bodyPr/>
           <a:lstStyle/>
           <a:p>
-            <a:endParaRPr lang="en-US"/>
+            <a:endParaRPr/>
           </a:p>
         </p:txBody>
       </p:sp>
@@ -18326,7 +18325,7 @@
         </p:nvSpPr>
         <p:spPr>
           <a:xfrm>
-            <a:off x="6029326" y="5763410"/>
+            <a:off x="6029326" y="5744360"/>
             <a:ext cx="1276350" cy="649917"/>
           </a:xfrm>
           <a:prstGeom prst="roundRect">
@@ -18347,7 +18346,7 @@
           <a:bodyPr/>
           <a:lstStyle/>
           <a:p>
-            <a:endParaRPr lang="en-US"/>
+            <a:endParaRPr/>
           </a:p>
         </p:txBody>
       </p:sp>
@@ -18367,7 +18366,7 @@
         </p:nvSpPr>
         <p:spPr>
           <a:xfrm>
-            <a:off x="6115050" y="5820559"/>
+            <a:off x="6115050" y="5801509"/>
             <a:ext cx="1152526" cy="228600"/>
           </a:xfrm>
           <a:prstGeom prst="rect">
@@ -18396,7 +18395,7 @@
               </a:defRPr>
             </a:pPr>
             <a:r>
-              <a:rPr sz="1200" b="1" dirty="0">
+              <a:rPr sz="1200" b="1">
                 <a:solidFill>
                   <a:srgbClr val="479575"/>
                 </a:solidFill>
@@ -18425,7 +18424,7 @@
         </p:nvSpPr>
         <p:spPr>
           <a:xfrm>
-            <a:off x="6096000" y="6049159"/>
+            <a:off x="6096000" y="6030109"/>
             <a:ext cx="1181100" cy="228600"/>
           </a:xfrm>
           <a:prstGeom prst="rect">
@@ -18454,7 +18453,7 @@
               </a:defRPr>
             </a:pPr>
             <a:r>
-              <a:rPr sz="1200" dirty="0">
+              <a:rPr sz="1200">
                 <a:solidFill>
                   <a:srgbClr val="202932"/>
                 </a:solidFill>
@@ -18483,7 +18482,7 @@
         </p:nvSpPr>
         <p:spPr>
           <a:xfrm>
-            <a:off x="7981950" y="5623013"/>
+            <a:off x="7981950" y="5501950"/>
             <a:ext cx="1933576" cy="257176"/>
           </a:xfrm>
           <a:prstGeom prst="rect">
@@ -18541,7 +18540,7 @@
         </p:nvSpPr>
         <p:spPr>
           <a:xfrm>
-            <a:off x="7972425" y="6013539"/>
+            <a:off x="7972425" y="5892476"/>
             <a:ext cx="1762126" cy="523876"/>
           </a:xfrm>
           <a:prstGeom prst="roundRect">
@@ -18562,7 +18561,7 @@
           <a:bodyPr/>
           <a:lstStyle/>
           <a:p>
-            <a:endParaRPr lang="en-US"/>
+            <a:endParaRPr/>
           </a:p>
         </p:txBody>
       </p:sp>
@@ -18582,7 +18581,7 @@
         </p:nvSpPr>
         <p:spPr>
           <a:xfrm>
-            <a:off x="8020050" y="6085757"/>
+            <a:off x="8020050" y="5964694"/>
             <a:ext cx="1666876" cy="384981"/>
           </a:xfrm>
           <a:custGeom>
@@ -18967,7 +18966,7 @@
           <a:bodyPr/>
           <a:lstStyle/>
           <a:p>
-            <a:endParaRPr lang="en-US"/>
+            <a:endParaRPr/>
           </a:p>
         </p:txBody>
       </p:sp>
@@ -18987,7 +18986,7 @@
         </p:nvSpPr>
         <p:spPr>
           <a:xfrm>
-            <a:off x="8439150" y="5953126"/>
+            <a:off x="8439150" y="5832063"/>
             <a:ext cx="381000" cy="647700"/>
           </a:xfrm>
           <a:prstGeom prst="rect">
@@ -19006,7 +19005,7 @@
           <a:bodyPr/>
           <a:lstStyle/>
           <a:p>
-            <a:endParaRPr lang="en-US"/>
+            <a:endParaRPr/>
           </a:p>
         </p:txBody>
       </p:sp>
@@ -19026,7 +19025,7 @@
         </p:nvSpPr>
         <p:spPr>
           <a:xfrm>
-            <a:off x="8096251" y="6600826"/>
+            <a:off x="8096251" y="6479763"/>
             <a:ext cx="1619250" cy="228600"/>
           </a:xfrm>
           <a:prstGeom prst="rect">
@@ -19055,7 +19054,7 @@
               </a:defRPr>
             </a:pPr>
             <a:r>
-              <a:rPr sz="1200" dirty="0">
+              <a:rPr sz="1200">
                 <a:solidFill>
                   <a:schemeClr val="bg2">
                     <a:lumMod val="75000"/>
@@ -19086,7 +19085,7 @@
         </p:nvSpPr>
         <p:spPr>
           <a:xfrm>
-            <a:off x="9810751" y="6242138"/>
+            <a:off x="9810751" y="6121075"/>
             <a:ext cx="323850" cy="95"/>
           </a:xfrm>
           <a:custGeom>
@@ -19117,7 +19116,7 @@
           <a:bodyPr/>
           <a:lstStyle/>
           <a:p>
-            <a:endParaRPr lang="en-US"/>
+            <a:endParaRPr/>
           </a:p>
         </p:txBody>
       </p:sp>
@@ -19137,7 +19136,7 @@
         </p:nvSpPr>
         <p:spPr>
           <a:xfrm>
-            <a:off x="10048875" y="6204038"/>
+            <a:off x="10048875" y="6082975"/>
             <a:ext cx="85726" cy="76200"/>
           </a:xfrm>
           <a:custGeom>
@@ -19172,7 +19171,7 @@
           <a:bodyPr/>
           <a:lstStyle/>
           <a:p>
-            <a:endParaRPr lang="en-US"/>
+            <a:endParaRPr/>
           </a:p>
         </p:txBody>
       </p:sp>
@@ -19192,7 +19191,7 @@
         </p:nvSpPr>
         <p:spPr>
           <a:xfrm>
-            <a:off x="10267951" y="5746838"/>
+            <a:off x="10267951" y="5625775"/>
             <a:ext cx="1809750" cy="457200"/>
           </a:xfrm>
           <a:prstGeom prst="roundRect">
@@ -19213,7 +19212,7 @@
           <a:bodyPr/>
           <a:lstStyle/>
           <a:p>
-            <a:endParaRPr lang="en-US"/>
+            <a:endParaRPr/>
           </a:p>
         </p:txBody>
       </p:sp>
@@ -19233,7 +19232,7 @@
         </p:nvSpPr>
         <p:spPr>
           <a:xfrm>
-            <a:off x="10372726" y="5842089"/>
+            <a:off x="10372726" y="5721026"/>
             <a:ext cx="1628776" cy="242888"/>
           </a:xfrm>
           <a:prstGeom prst="rect">
@@ -19291,7 +19290,7 @@
         </p:nvSpPr>
         <p:spPr>
           <a:xfrm>
-            <a:off x="10267951" y="6404063"/>
+            <a:off x="10267951" y="6168700"/>
             <a:ext cx="1809750" cy="457200"/>
           </a:xfrm>
           <a:prstGeom prst="roundRect">
@@ -19312,7 +19311,7 @@
           <a:bodyPr/>
           <a:lstStyle/>
           <a:p>
-            <a:endParaRPr lang="en-US"/>
+            <a:endParaRPr/>
           </a:p>
         </p:txBody>
       </p:sp>
@@ -19332,7 +19331,7 @@
         </p:nvSpPr>
         <p:spPr>
           <a:xfrm>
-            <a:off x="10382251" y="6508839"/>
+            <a:off x="10382251" y="6273476"/>
             <a:ext cx="1619250" cy="242888"/>
           </a:xfrm>
           <a:prstGeom prst="rect">
@@ -19390,7 +19389,7 @@
         </p:nvSpPr>
         <p:spPr>
           <a:xfrm>
-            <a:off x="11172825" y="6223088"/>
+            <a:off x="11172825" y="6102025"/>
             <a:ext cx="95" cy="152400"/>
           </a:xfrm>
           <a:custGeom>
@@ -19421,7 +19420,7 @@
           <a:bodyPr/>
           <a:lstStyle/>
           <a:p>
-            <a:endParaRPr lang="en-US"/>
+            <a:endParaRPr/>
           </a:p>
         </p:txBody>
       </p:sp>
@@ -19441,7 +19440,7 @@
         </p:nvSpPr>
         <p:spPr>
           <a:xfrm>
-            <a:off x="11134726" y="6289763"/>
+            <a:off x="11134726" y="6168700"/>
             <a:ext cx="76200" cy="85726"/>
           </a:xfrm>
           <a:custGeom>
@@ -19476,7 +19475,7 @@
           <a:bodyPr/>
           <a:lstStyle/>
           <a:p>
-            <a:endParaRPr lang="en-US"/>
+            <a:endParaRPr/>
           </a:p>
         </p:txBody>
       </p:sp>
@@ -19496,7 +19495,7 @@
         </p:nvSpPr>
         <p:spPr>
           <a:xfrm>
-            <a:off x="12192000" y="6632664"/>
+            <a:off x="12192000" y="6397301"/>
             <a:ext cx="314326" cy="95"/>
           </a:xfrm>
           <a:custGeom>
@@ -19527,7 +19526,7 @@
           <a:bodyPr/>
           <a:lstStyle/>
           <a:p>
-            <a:endParaRPr lang="en-US"/>
+            <a:endParaRPr/>
           </a:p>
         </p:txBody>
       </p:sp>
@@ -19547,7 +19546,7 @@
         </p:nvSpPr>
         <p:spPr>
           <a:xfrm>
-            <a:off x="12420600" y="6594563"/>
+            <a:off x="12420600" y="6359200"/>
             <a:ext cx="85726" cy="76200"/>
           </a:xfrm>
           <a:custGeom>
@@ -19582,7 +19581,7 @@
           <a:bodyPr/>
           <a:lstStyle/>
           <a:p>
-            <a:endParaRPr lang="en-US"/>
+            <a:endParaRPr/>
           </a:p>
         </p:txBody>
       </p:sp>
@@ -19602,7 +19601,7 @@
         </p:nvSpPr>
         <p:spPr>
           <a:xfrm>
-            <a:off x="12639676" y="6042113"/>
+            <a:off x="12639676" y="5921050"/>
             <a:ext cx="95250" cy="247650"/>
           </a:xfrm>
           <a:prstGeom prst="rect">
@@ -19621,7 +19620,7 @@
           <a:bodyPr/>
           <a:lstStyle/>
           <a:p>
-            <a:endParaRPr lang="en-US"/>
+            <a:endParaRPr/>
           </a:p>
         </p:txBody>
       </p:sp>
@@ -19641,7 +19640,7 @@
         </p:nvSpPr>
         <p:spPr>
           <a:xfrm>
-            <a:off x="12763501" y="6042113"/>
+            <a:off x="12763501" y="5921050"/>
             <a:ext cx="95250" cy="247650"/>
           </a:xfrm>
           <a:prstGeom prst="rect">
@@ -19660,7 +19659,7 @@
           <a:bodyPr/>
           <a:lstStyle/>
           <a:p>
-            <a:endParaRPr lang="en-US"/>
+            <a:endParaRPr/>
           </a:p>
         </p:txBody>
       </p:sp>
@@ -19680,7 +19679,7 @@
         </p:nvSpPr>
         <p:spPr>
           <a:xfrm>
-            <a:off x="12887326" y="6042113"/>
+            <a:off x="12887326" y="5921050"/>
             <a:ext cx="95250" cy="247650"/>
           </a:xfrm>
           <a:prstGeom prst="rect">
@@ -19699,7 +19698,7 @@
           <a:bodyPr/>
           <a:lstStyle/>
           <a:p>
-            <a:endParaRPr lang="en-US"/>
+            <a:endParaRPr/>
           </a:p>
         </p:txBody>
       </p:sp>
@@ -19719,7 +19718,7 @@
         </p:nvSpPr>
         <p:spPr>
           <a:xfrm>
-            <a:off x="13011151" y="6042113"/>
+            <a:off x="13011151" y="5921050"/>
             <a:ext cx="95250" cy="247650"/>
           </a:xfrm>
           <a:prstGeom prst="rect">
@@ -19738,7 +19737,7 @@
           <a:bodyPr/>
           <a:lstStyle/>
           <a:p>
-            <a:endParaRPr lang="en-US"/>
+            <a:endParaRPr/>
           </a:p>
         </p:txBody>
       </p:sp>
@@ -19758,7 +19757,7 @@
         </p:nvSpPr>
         <p:spPr>
           <a:xfrm>
-            <a:off x="13134976" y="6042113"/>
+            <a:off x="13134976" y="5921050"/>
             <a:ext cx="95250" cy="247650"/>
           </a:xfrm>
           <a:prstGeom prst="rect">
@@ -19777,7 +19776,7 @@
           <a:bodyPr/>
           <a:lstStyle/>
           <a:p>
-            <a:endParaRPr lang="en-US"/>
+            <a:endParaRPr/>
           </a:p>
         </p:txBody>
       </p:sp>
@@ -19797,7 +19796,7 @@
         </p:nvSpPr>
         <p:spPr>
           <a:xfrm>
-            <a:off x="13258801" y="6042113"/>
+            <a:off x="13258801" y="5921050"/>
             <a:ext cx="95250" cy="247650"/>
           </a:xfrm>
           <a:prstGeom prst="rect">
@@ -19816,7 +19815,7 @@
           <a:bodyPr/>
           <a:lstStyle/>
           <a:p>
-            <a:endParaRPr lang="en-US"/>
+            <a:endParaRPr/>
           </a:p>
         </p:txBody>
       </p:sp>
@@ -19836,7 +19835,7 @@
         </p:nvSpPr>
         <p:spPr>
           <a:xfrm>
-            <a:off x="13382626" y="6042113"/>
+            <a:off x="13382626" y="5921050"/>
             <a:ext cx="95250" cy="247650"/>
           </a:xfrm>
           <a:prstGeom prst="rect">
@@ -19855,7 +19854,7 @@
           <a:bodyPr/>
           <a:lstStyle/>
           <a:p>
-            <a:endParaRPr lang="en-US"/>
+            <a:endParaRPr/>
           </a:p>
         </p:txBody>
       </p:sp>
@@ -19875,7 +19874,7 @@
         </p:nvSpPr>
         <p:spPr>
           <a:xfrm>
-            <a:off x="13506451" y="6042113"/>
+            <a:off x="13506451" y="5921050"/>
             <a:ext cx="95250" cy="247650"/>
           </a:xfrm>
           <a:prstGeom prst="rect">
@@ -19894,7 +19893,7 @@
           <a:bodyPr/>
           <a:lstStyle/>
           <a:p>
-            <a:endParaRPr lang="en-US"/>
+            <a:endParaRPr/>
           </a:p>
         </p:txBody>
       </p:sp>
@@ -19914,7 +19913,7 @@
         </p:nvSpPr>
         <p:spPr>
           <a:xfrm>
-            <a:off x="12353039" y="5673518"/>
+            <a:off x="12353039" y="5552455"/>
             <a:ext cx="2238376" cy="242888"/>
           </a:xfrm>
           <a:prstGeom prst="rect">
@@ -19943,7 +19942,7 @@
               </a:defRPr>
             </a:pPr>
             <a:r>
-              <a:rPr sz="1276" b="1" dirty="0">
+              <a:rPr sz="1276" b="1">
                 <a:solidFill>
                   <a:srgbClr val="CC8740"/>
                 </a:solidFill>
@@ -19972,7 +19971,7 @@
         </p:nvSpPr>
         <p:spPr>
           <a:xfrm>
-            <a:off x="12639676" y="6423113"/>
+            <a:off x="12639676" y="6187750"/>
             <a:ext cx="95250" cy="161926"/>
           </a:xfrm>
           <a:prstGeom prst="rect">
@@ -19991,7 +19990,7 @@
           <a:bodyPr/>
           <a:lstStyle/>
           <a:p>
-            <a:endParaRPr lang="en-US"/>
+            <a:endParaRPr/>
           </a:p>
         </p:txBody>
       </p:sp>
@@ -20011,7 +20010,7 @@
         </p:nvSpPr>
         <p:spPr>
           <a:xfrm>
-            <a:off x="12763501" y="6423113"/>
+            <a:off x="12763501" y="6187750"/>
             <a:ext cx="95250" cy="161926"/>
           </a:xfrm>
           <a:prstGeom prst="rect">
@@ -20030,7 +20029,7 @@
           <a:bodyPr/>
           <a:lstStyle/>
           <a:p>
-            <a:endParaRPr lang="en-US"/>
+            <a:endParaRPr/>
           </a:p>
         </p:txBody>
       </p:sp>
@@ -20050,7 +20049,7 @@
         </p:nvSpPr>
         <p:spPr>
           <a:xfrm>
-            <a:off x="12887326" y="6423113"/>
+            <a:off x="12887326" y="6187750"/>
             <a:ext cx="95250" cy="161926"/>
           </a:xfrm>
           <a:prstGeom prst="rect">
@@ -20069,7 +20068,7 @@
           <a:bodyPr/>
           <a:lstStyle/>
           <a:p>
-            <a:endParaRPr lang="en-US"/>
+            <a:endParaRPr/>
           </a:p>
         </p:txBody>
       </p:sp>
@@ -20089,7 +20088,7 @@
         </p:nvSpPr>
         <p:spPr>
           <a:xfrm>
-            <a:off x="13011151" y="6423113"/>
+            <a:off x="13011151" y="6187750"/>
             <a:ext cx="95250" cy="161926"/>
           </a:xfrm>
           <a:prstGeom prst="rect">
@@ -20108,7 +20107,7 @@
           <a:bodyPr/>
           <a:lstStyle/>
           <a:p>
-            <a:endParaRPr lang="en-US"/>
+            <a:endParaRPr/>
           </a:p>
         </p:txBody>
       </p:sp>
@@ -20128,7 +20127,7 @@
         </p:nvSpPr>
         <p:spPr>
           <a:xfrm>
-            <a:off x="13134976" y="6423113"/>
+            <a:off x="13134976" y="6187750"/>
             <a:ext cx="95250" cy="161926"/>
           </a:xfrm>
           <a:prstGeom prst="rect">
@@ -20147,7 +20146,7 @@
           <a:bodyPr/>
           <a:lstStyle/>
           <a:p>
-            <a:endParaRPr lang="en-US"/>
+            <a:endParaRPr/>
           </a:p>
         </p:txBody>
       </p:sp>
@@ -20167,7 +20166,7 @@
         </p:nvSpPr>
         <p:spPr>
           <a:xfrm>
-            <a:off x="13258801" y="6423113"/>
+            <a:off x="13258801" y="6187750"/>
             <a:ext cx="95250" cy="161926"/>
           </a:xfrm>
           <a:prstGeom prst="rect">
@@ -20186,7 +20185,7 @@
           <a:bodyPr/>
           <a:lstStyle/>
           <a:p>
-            <a:endParaRPr lang="en-US"/>
+            <a:endParaRPr/>
           </a:p>
         </p:txBody>
       </p:sp>
@@ -20206,7 +20205,7 @@
         </p:nvSpPr>
         <p:spPr>
           <a:xfrm>
-            <a:off x="13382626" y="6423113"/>
+            <a:off x="13382626" y="6187750"/>
             <a:ext cx="95250" cy="161926"/>
           </a:xfrm>
           <a:prstGeom prst="rect">
@@ -20225,7 +20224,7 @@
           <a:bodyPr/>
           <a:lstStyle/>
           <a:p>
-            <a:endParaRPr lang="en-US"/>
+            <a:endParaRPr/>
           </a:p>
         </p:txBody>
       </p:sp>
@@ -20245,7 +20244,7 @@
         </p:nvSpPr>
         <p:spPr>
           <a:xfrm>
-            <a:off x="13506451" y="6423113"/>
+            <a:off x="13506451" y="6187750"/>
             <a:ext cx="95250" cy="161926"/>
           </a:xfrm>
           <a:prstGeom prst="rect">
@@ -20264,7 +20263,7 @@
           <a:bodyPr/>
           <a:lstStyle/>
           <a:p>
-            <a:endParaRPr lang="en-US"/>
+            <a:endParaRPr/>
           </a:p>
         </p:txBody>
       </p:sp>
@@ -20284,7 +20283,7 @@
         </p:nvSpPr>
         <p:spPr>
           <a:xfrm>
-            <a:off x="12585527" y="6600826"/>
+            <a:off x="12585527" y="6365463"/>
             <a:ext cx="2190750" cy="242888"/>
           </a:xfrm>
           <a:prstGeom prst="rect">
@@ -20313,7 +20312,7 @@
               </a:defRPr>
             </a:pPr>
             <a:r>
-              <a:rPr sz="1276" dirty="0">
+              <a:rPr sz="1276">
                 <a:solidFill>
                   <a:srgbClr val="202932"/>
                 </a:solidFill>
@@ -20371,7 +20370,7 @@
               </a:defRPr>
             </a:pPr>
             <a:r>
-              <a:rPr sz="1726" b="1" dirty="0">
+              <a:rPr sz="1726" b="1">
                 <a:solidFill>
                   <a:srgbClr val="202932"/>
                 </a:solidFill>
@@ -20384,8 +20383,8 @@
           </a:p>
         </p:txBody>
       </p:sp>
-      <mc:AlternateContent xmlns:mc="http://schemas.openxmlformats.org/markup-compatibility/2006" xmlns:a14="http://schemas.microsoft.com/office/drawing/2010/main">
-        <mc:Choice Requires="a14">
+      <mc:AlternateContent xmlns:mc="http://schemas.openxmlformats.org/markup-compatibility/2006">
+        <mc:Choice xmlns:a14="http://schemas.microsoft.com/office/drawing/2010/main" Requires="a14">
           <p:sp>
             <p:nvSpPr>
               <p:cNvPr id="8" name="TextBox 7">
@@ -20395,13 +20394,15 @@
                   </a:ext>
                 </a:extLst>
               </p:cNvPr>
-              <p:cNvSpPr txBox="1"/>
+              <p:cNvSpPr>
+                <a:spLocks noGrp="1"/>
+              </p:cNvSpPr>
               <p:nvPr/>
             </p:nvSpPr>
             <p:spPr>
               <a:xfrm>
-                <a:off x="3694273" y="1133032"/>
-                <a:ext cx="2392203" cy="518604"/>
+                <a:off x="3358554" y="1133953"/>
+                <a:ext cx="3058904" cy="518604"/>
               </a:xfrm>
               <a:prstGeom prst="rect">
                 <a:avLst/>
@@ -20409,12 +20410,14 @@
               <a:noFill/>
             </p:spPr>
             <p:txBody>
-              <a:bodyPr wrap="square" lIns="0" tIns="0" rIns="0" bIns="0" rtlCol="0">
+              <a:bodyPr wrap="square" lIns="0" tIns="0" rIns="0" bIns="0">
                 <a:spAutoFit/>
               </a:bodyPr>
               <a:lstStyle/>
               <a:p>
-                <a:pPr/>
+                <a:pPr>
+                  <a:buNone/>
+                </a:pPr>
                 <a14:m>
                   <m:oMathPara xmlns:m="http://schemas.openxmlformats.org/officeDocument/2006/math">
                     <m:oMathParaPr>
@@ -20422,17 +20425,18 @@
                     </m:oMathParaPr>
                     <m:oMath xmlns:m="http://schemas.openxmlformats.org/officeDocument/2006/math">
                       <m:r>
-                        <m:rPr>
-                          <m:sty m:val="p"/>
-                        </m:rPr>
                         <a:rPr lang="en-US" i="1">
-                          <a:latin typeface="Cambria Math" panose="02040503050406030204" pitchFamily="18" charset="0"/>
+                          <a:latin typeface="Cambria Math"/>
+                          <a:ea typeface="Cambria Math"/>
+                          <a:cs typeface="Cambria Math"/>
                         </a:rPr>
-                        <m:t>Loss</m:t>
+                        <m:t>𝐿𝑜𝑠𝑠</m:t>
                       </m:r>
                       <m:r>
                         <a:rPr lang="en-US" i="1">
-                          <a:latin typeface="Cambria Math" panose="02040503050406030204" pitchFamily="18" charset="0"/>
+                          <a:latin typeface="Cambria Math"/>
+                          <a:ea typeface="Cambria Math"/>
+                          <a:cs typeface="Cambria Math"/>
                         </a:rPr>
                         <m:t>=</m:t>
                       </m:r>
@@ -20441,13 +20445,17 @@
                           <m:ctrlPr>
                             <a:rPr lang="en-US" i="1">
                               <a:latin typeface="Cambria Math" panose="02040503050406030204" pitchFamily="18" charset="0"/>
+                              <a:ea typeface="Cambria Math"/>
+                              <a:cs typeface="Cambria Math"/>
                             </a:rPr>
                           </m:ctrlPr>
                         </m:fPr>
                         <m:num>
                           <m:r>
                             <a:rPr lang="en-US" i="1">
-                              <a:latin typeface="Cambria Math" panose="02040503050406030204" pitchFamily="18" charset="0"/>
+                              <a:latin typeface="Cambria Math"/>
+                              <a:ea typeface="Cambria Math"/>
+                              <a:cs typeface="Cambria Math"/>
                             </a:rPr>
                             <m:t>1</m:t>
                           </m:r>
@@ -20455,7 +20463,9 @@
                         <m:den>
                           <m:r>
                             <a:rPr lang="en-US" i="1">
-                              <a:latin typeface="Cambria Math" panose="02040503050406030204" pitchFamily="18" charset="0"/>
+                              <a:latin typeface="Cambria Math"/>
+                              <a:ea typeface="Cambria Math"/>
+                              <a:cs typeface="Cambria Math"/>
                             </a:rPr>
                             <m:t>2</m:t>
                           </m:r>
@@ -20463,7 +20473,9 @@
                       </m:f>
                       <m:r>
                         <a:rPr lang="en-US" i="1">
-                          <a:latin typeface="Cambria Math" panose="02040503050406030204" pitchFamily="18" charset="0"/>
+                          <a:latin typeface="Cambria Math"/>
+                          <a:ea typeface="Cambria Math"/>
+                          <a:cs typeface="Cambria Math"/>
                         </a:rPr>
                         <m:t>(</m:t>
                       </m:r>
@@ -20472,52 +20484,53 @@
                           <m:ctrlPr>
                             <a:rPr lang="en-US" i="1">
                               <a:latin typeface="Cambria Math" panose="02040503050406030204" pitchFamily="18" charset="0"/>
+                              <a:ea typeface="Cambria Math"/>
+                              <a:cs typeface="Cambria Math"/>
                             </a:rPr>
                           </m:ctrlPr>
                         </m:sSubPr>
                         <m:e>
                           <m:r>
-                            <m:rPr>
-                              <m:sty m:val="p"/>
-                            </m:rPr>
                             <a:rPr lang="en-US" i="1">
-                              <a:latin typeface="Cambria Math" panose="02040503050406030204" pitchFamily="18" charset="0"/>
+                              <a:latin typeface="Cambria Math"/>
+                              <a:ea typeface="Cambria Math"/>
+                              <a:cs typeface="Cambria Math"/>
                             </a:rPr>
-                            <m:t>L</m:t>
+                            <m:t>𝐿</m:t>
                           </m:r>
                         </m:e>
                         <m:sub>
                           <m:r>
-                            <m:rPr>
-                              <m:sty m:val="p"/>
-                            </m:rPr>
                             <a:rPr lang="en-US" i="1">
-                              <a:latin typeface="Cambria Math" panose="02040503050406030204" pitchFamily="18" charset="0"/>
+                              <a:latin typeface="Cambria Math"/>
+                              <a:ea typeface="Cambria Math"/>
+                              <a:cs typeface="Cambria Math"/>
                             </a:rPr>
-                            <m:t>Q</m:t>
+                            <m:t>𝑄</m:t>
                           </m:r>
                           <m:r>
                             <a:rPr lang="en-US" i="1">
-                              <a:latin typeface="Cambria Math" panose="02040503050406030204" pitchFamily="18" charset="0"/>
-                              <a:ea typeface="Cambria Math" panose="02040503050406030204" pitchFamily="18" charset="0"/>
+                              <a:latin typeface="Cambria Math"/>
+                              <a:ea typeface="Cambria Math"/>
+                              <a:cs typeface="Cambria Math"/>
                             </a:rPr>
                             <m:t>→</m:t>
                           </m:r>
                           <m:r>
-                            <m:rPr>
-                              <m:sty m:val="p"/>
-                            </m:rPr>
                             <a:rPr lang="en-US" i="1">
-                              <a:latin typeface="Cambria Math" panose="02040503050406030204" pitchFamily="18" charset="0"/>
-                              <a:ea typeface="Cambria Math" panose="02040503050406030204" pitchFamily="18" charset="0"/>
+                              <a:latin typeface="Cambria Math"/>
+                              <a:ea typeface="Cambria Math"/>
+                              <a:cs typeface="Cambria Math"/>
                             </a:rPr>
-                            <m:t>R</m:t>
+                            <m:t>𝑅</m:t>
                           </m:r>
                         </m:sub>
                       </m:sSub>
                       <m:r>
                         <a:rPr lang="en-US" i="1">
-                          <a:latin typeface="Cambria Math" panose="02040503050406030204" pitchFamily="18" charset="0"/>
+                          <a:latin typeface="Cambria Math"/>
+                          <a:ea typeface="Cambria Math"/>
+                          <a:cs typeface="Cambria Math"/>
                         </a:rPr>
                         <m:t>+</m:t>
                       </m:r>
@@ -20526,64 +20539,65 @@
                           <m:ctrlPr>
                             <a:rPr lang="en-US" i="1">
                               <a:latin typeface="Cambria Math" panose="02040503050406030204" pitchFamily="18" charset="0"/>
+                              <a:ea typeface="Cambria Math"/>
+                              <a:cs typeface="Cambria Math"/>
                             </a:rPr>
                           </m:ctrlPr>
                         </m:sSubPr>
                         <m:e>
                           <m:r>
-                            <m:rPr>
-                              <m:sty m:val="p"/>
-                            </m:rPr>
                             <a:rPr lang="en-US" i="1">
-                              <a:latin typeface="Cambria Math" panose="02040503050406030204" pitchFamily="18" charset="0"/>
+                              <a:latin typeface="Cambria Math"/>
+                              <a:ea typeface="Cambria Math"/>
+                              <a:cs typeface="Cambria Math"/>
                             </a:rPr>
-                            <m:t>L</m:t>
+                            <m:t>𝐿</m:t>
                           </m:r>
                         </m:e>
                         <m:sub>
                           <m:r>
-                            <m:rPr>
-                              <m:sty m:val="p"/>
-                            </m:rPr>
                             <a:rPr lang="en-US" i="1">
-                              <a:latin typeface="Cambria Math" panose="02040503050406030204" pitchFamily="18" charset="0"/>
+                              <a:latin typeface="Cambria Math"/>
+                              <a:ea typeface="Cambria Math"/>
+                              <a:cs typeface="Cambria Math"/>
                             </a:rPr>
-                            <m:t>R</m:t>
+                            <m:t>𝑅</m:t>
                           </m:r>
                           <m:r>
                             <a:rPr lang="en-US" i="1">
-                              <a:latin typeface="Cambria Math" panose="02040503050406030204" pitchFamily="18" charset="0"/>
-                              <a:ea typeface="Cambria Math" panose="02040503050406030204" pitchFamily="18" charset="0"/>
+                              <a:latin typeface="Cambria Math"/>
+                              <a:ea typeface="Cambria Math"/>
+                              <a:cs typeface="Cambria Math"/>
                             </a:rPr>
                             <m:t>→</m:t>
                           </m:r>
                           <m:r>
-                            <m:rPr>
-                              <m:sty m:val="p"/>
-                            </m:rPr>
                             <a:rPr lang="en-US" i="1">
-                              <a:latin typeface="Cambria Math" panose="02040503050406030204" pitchFamily="18" charset="0"/>
-                              <a:ea typeface="Cambria Math" panose="02040503050406030204" pitchFamily="18" charset="0"/>
+                              <a:latin typeface="Cambria Math"/>
+                              <a:ea typeface="Cambria Math"/>
+                              <a:cs typeface="Cambria Math"/>
                             </a:rPr>
-                            <m:t>Q</m:t>
+                            <m:t>𝑄</m:t>
                           </m:r>
                         </m:sub>
                       </m:sSub>
                       <m:r>
                         <a:rPr lang="en-US" i="1">
-                          <a:latin typeface="Cambria Math" panose="02040503050406030204" pitchFamily="18" charset="0"/>
+                          <a:latin typeface="Cambria Math"/>
+                          <a:ea typeface="Cambria Math"/>
+                          <a:cs typeface="Cambria Math"/>
                         </a:rPr>
                         <m:t>)</m:t>
                       </m:r>
                     </m:oMath>
                   </m:oMathPara>
                 </a14:m>
-                <a:endParaRPr lang="en-US" dirty="0"/>
+                <a:endParaRPr dirty="0"/>
               </a:p>
             </p:txBody>
           </p:sp>
         </mc:Choice>
-        <mc:Fallback xmlns="">
+        <mc:Fallback>
           <p:sp>
             <p:nvSpPr>
               <p:cNvPr id="8" name="TextBox 7">
@@ -20593,15 +20607,15 @@
                   </a:ext>
                 </a:extLst>
               </p:cNvPr>
-              <p:cNvSpPr txBox="1">
-                <a:spLocks noRot="1" noChangeAspect="1" noMove="1" noResize="1" noEditPoints="1" noAdjustHandles="1" noChangeArrowheads="1" noChangeShapeType="1" noTextEdit="1"/>
+              <p:cNvSpPr>
+                <a:spLocks noGrp="1" noRot="1" noChangeAspect="1" noMove="1" noResize="1" noEditPoints="1" noAdjustHandles="1" noChangeArrowheads="1" noChangeShapeType="1" noTextEdit="1"/>
               </p:cNvSpPr>
               <p:nvPr/>
             </p:nvSpPr>
             <p:spPr>
               <a:xfrm>
-                <a:off x="3694273" y="1133032"/>
-                <a:ext cx="2392203" cy="518604"/>
+                <a:off x="3358554" y="1133953"/>
+                <a:ext cx="3058904" cy="518604"/>
               </a:xfrm>
               <a:prstGeom prst="rect">
                 <a:avLst/>
@@ -20609,7 +20623,7 @@
               <a:blipFill>
                 <a:blip r:embed="rId3"/>
                 <a:stretch>
-                  <a:fillRect l="-2632" t="-7143" r="-4211" b="-11905"/>
+                  <a:fillRect t="-4762" b="-11905"/>
                 </a:stretch>
               </a:blipFill>
             </p:spPr>
